--- a/presentation/api-patterns-graphql-python/api-patterns-graphql-python.pptx
+++ b/presentation/api-patterns-graphql-python/api-patterns-graphql-python.pptx
@@ -73,9 +73,10 @@
     <p:sldId id="321" r:id="rId67"/>
     <p:sldId id="322" r:id="rId68"/>
     <p:sldId id="323" r:id="rId69"/>
+    <p:sldId id="324" r:id="rId70"/>
   </p:sldIdLst>
   <p:notesMasterIdLst>
-    <p:notesMasterId r:id="rId70"/>
+    <p:notesMasterId r:id="rId71"/>
   </p:notesMasterIdLst>
   <p:sldSz cx="12192000" cy="6858000"/>
   <p:notesSz cx="6858000" cy="12192000"/>
@@ -6225,6 +6226,94 @@
             <a:fld id="{F7021451-1387-4CA6-816F-3879F97B5CBC}" type="slidenum">
               <a:rPr lang="en-US"/>
               <a:t>68</a:t>
+            </a:fld>
+            <a:endParaRPr lang="en-US"/>
+          </a:p>
+        </p:txBody>
+      </p:sp>
+    </p:spTree>
+    <p:extLst>
+      <p:ext uri="{BB962C8B-B14F-4D97-AF65-F5344CB8AC3E}">
+        <p14:creationId xmlns:p14="http://schemas.microsoft.com/office/powerpoint/2010/main" val="1024086991"/>
+      </p:ext>
+    </p:extLst>
+  </p:cSld>
+  <p:clrMapOvr>
+    <a:masterClrMapping/>
+  </p:clrMapOvr>
+</p:notes>
+</file>
+
+<file path=ppt/notesSlides/notesSlide69.xml><?xml version="1.0" encoding="utf-8"?>
+<p:notes xmlns:a="http://schemas.openxmlformats.org/drawingml/2006/main" xmlns:r="http://schemas.openxmlformats.org/officeDocument/2006/relationships" xmlns:p="http://schemas.openxmlformats.org/presentationml/2006/main">
+  <p:cSld>
+    <p:spTree>
+      <p:nvGrpSpPr>
+        <p:cNvPr id="1" name=""/>
+        <p:cNvGrpSpPr/>
+        <p:nvPr/>
+      </p:nvGrpSpPr>
+      <p:grpSpPr>
+        <a:xfrm>
+          <a:off x="0" y="0"/>
+          <a:ext cx="0" cy="0"/>
+          <a:chOff x="0" y="0"/>
+          <a:chExt cx="0" cy="0"/>
+        </a:xfrm>
+      </p:grpSpPr>
+      <p:sp>
+        <p:nvSpPr>
+          <p:cNvPr id="2" name="Slide Image Placeholder 1"/>
+          <p:cNvSpPr>
+            <a:spLocks noGrp="1" noRot="1" noChangeAspect="1"/>
+          </p:cNvSpPr>
+          <p:nvPr>
+            <p:ph type="sldImg"/>
+          </p:nvPr>
+        </p:nvSpPr>
+        <p:spPr/>
+      </p:sp>
+      <p:sp>
+        <p:nvSpPr>
+          <p:cNvPr id="3" name="Notes Placeholder 2"/>
+          <p:cNvSpPr>
+            <a:spLocks noGrp="1"/>
+          </p:cNvSpPr>
+          <p:nvPr>
+            <p:ph type="body" idx="1"/>
+          </p:nvPr>
+        </p:nvSpPr>
+        <p:spPr/>
+        <p:txBody>
+          <a:bodyPr/>
+          <a:lstStyle/>
+          <a:p>
+            <a:r>
+              <a:rPr lang="en-US" dirty="0"/>
+              <a:t>This is the Python/Strawberry implementation deck, so the left code takes you to the runnable Python example and schema, the right to the whole series. On the left, the site: the chapters, the GraphQL schema and contracts, and the runnable both-stack examples, all public. On the right, the Workshops and Tutorials hub: every workshop, tutorial, and deck in the series in one place, including the REST, gRPC, and WebSockets siblings. Scan whichever is useful; both are on the Pattern Catalyst GitHub organization.</a:t>
+            </a:r>
+            <a:endParaRPr lang="en-US" dirty="0"/>
+          </a:p>
+        </p:txBody>
+      </p:sp>
+      <p:sp>
+        <p:nvSpPr>
+          <p:cNvPr id="4" name="Slide Number Placeholder 3"/>
+          <p:cNvSpPr>
+            <a:spLocks noGrp="1"/>
+          </p:cNvSpPr>
+          <p:nvPr>
+            <p:ph type="sldNum" sz="quarter" idx="10"/>
+          </p:nvPr>
+        </p:nvSpPr>
+        <p:spPr/>
+        <p:txBody>
+          <a:bodyPr/>
+          <a:lstStyle/>
+          <a:p>
+            <a:fld id="{F7021451-1387-4CA6-816F-3879F97B5CBC}" type="slidenum">
+              <a:rPr lang="en-US"/>
+              <a:t>69</a:t>
             </a:fld>
             <a:endParaRPr lang="en-US"/>
           </a:p>
@@ -6880,7 +6969,7 @@
       </p:grpSpPr>
       <p:pic>
         <p:nvPicPr>
-          <p:cNvPr id="2" name="Image 0" descr="/work/_shared/assets/cover-panel.png">    </p:cNvPr>
+          <p:cNvPr id="2" name="Image 0" descr="/tmp/pcwork/api-patterns-and-practices-graphql/presentation/_shared/assets/cover-panel.png">    </p:cNvPr>
           <p:cNvPicPr>
             <a:picLocks noChangeAspect="1"/>
           </p:cNvPicPr>
@@ -7094,7 +7183,7 @@
       </p:sp>
       <p:pic>
         <p:nvPicPr>
-          <p:cNvPr id="7" name="Image 1" descr="/work/_shared/assets/logo-candidate-2.png">    </p:cNvPr>
+          <p:cNvPr id="7" name="Image 1" descr="/tmp/pcwork/api-patterns-and-practices-graphql/presentation/_shared/assets/logo-candidate-2.png">    </p:cNvPr>
           <p:cNvPicPr>
             <a:picLocks noChangeAspect="1"/>
           </p:cNvPicPr>
@@ -7182,7 +7271,7 @@
       </p:sp>
       <p:pic>
         <p:nvPicPr>
-          <p:cNvPr id="3" name="Image 0" descr="/work/_shared/assets/logo-candidate-2.png">    </p:cNvPr>
+          <p:cNvPr id="3" name="Image 0" descr="/tmp/pcwork/api-patterns-and-practices-graphql/presentation/_shared/assets/logo-candidate-2.png">    </p:cNvPr>
           <p:cNvPicPr>
             <a:picLocks noChangeAspect="1"/>
           </p:cNvPicPr>
@@ -7908,7 +7997,7 @@
       </p:sp>
       <p:pic>
         <p:nvPicPr>
-          <p:cNvPr id="3" name="Image 0" descr="/work/_shared/assets/logo-candidate-2.png">    </p:cNvPr>
+          <p:cNvPr id="3" name="Image 0" descr="/tmp/pcwork/api-patterns-and-practices-graphql/presentation/_shared/assets/logo-candidate-2.png">    </p:cNvPr>
           <p:cNvPicPr>
             <a:picLocks noChangeAspect="1"/>
           </p:cNvPicPr>
@@ -8010,7 +8099,7 @@
       </p:sp>
       <p:pic>
         <p:nvPicPr>
-          <p:cNvPr id="6" name="Image 1" descr="/work/_shared/png/05-two-direction-diff.png">    </p:cNvPr>
+          <p:cNvPr id="6" name="Image 1" descr="/tmp/pcwork/api-patterns-and-practices-graphql/presentation/_shared/png/05-two-direction-diff.png">    </p:cNvPr>
           <p:cNvPicPr>
             <a:picLocks noChangeAspect="1"/>
           </p:cNvPicPr>
@@ -8136,7 +8225,7 @@
       </p:sp>
       <p:pic>
         <p:nvPicPr>
-          <p:cNvPr id="3" name="Image 0" descr="/work/_shared/assets/logo-candidate-2.png">    </p:cNvPr>
+          <p:cNvPr id="3" name="Image 0" descr="/tmp/pcwork/api-patterns-and-practices-graphql/presentation/_shared/assets/logo-candidate-2.png">    </p:cNvPr>
           <p:cNvPicPr>
             <a:picLocks noChangeAspect="1"/>
           </p:cNvPicPr>
@@ -8814,7 +8903,7 @@
       </p:sp>
       <p:pic>
         <p:nvPicPr>
-          <p:cNvPr id="5" name="Image 0" descr="/work/_shared/assets/redhat-logo-white.png">    </p:cNvPr>
+          <p:cNvPr id="5" name="Image 0" descr="/tmp/pcwork/api-patterns-and-practices-graphql/presentation/_shared/assets/redhat-logo-white.png">    </p:cNvPr>
           <p:cNvPicPr>
             <a:picLocks noChangeAspect="1"/>
           </p:cNvPicPr>
@@ -8902,7 +8991,7 @@
       </p:sp>
       <p:pic>
         <p:nvPicPr>
-          <p:cNvPr id="3" name="Image 0" descr="/work/_shared/assets/logo-candidate-2.png">    </p:cNvPr>
+          <p:cNvPr id="3" name="Image 0" descr="/tmp/pcwork/api-patterns-and-practices-graphql/presentation/_shared/assets/logo-candidate-2.png">    </p:cNvPr>
           <p:cNvPicPr>
             <a:picLocks noChangeAspect="1"/>
           </p:cNvPicPr>
@@ -9004,7 +9093,7 @@
       </p:sp>
       <p:pic>
         <p:nvPicPr>
-          <p:cNvPr id="6" name="Image 1" descr="/work/_shared/png/06-parallel-siblings.png">    </p:cNvPr>
+          <p:cNvPr id="6" name="Image 1" descr="/tmp/pcwork/api-patterns-and-practices-graphql/presentation/_shared/png/06-parallel-siblings.png">    </p:cNvPr>
           <p:cNvPicPr>
             <a:picLocks noChangeAspect="1"/>
           </p:cNvPicPr>
@@ -9130,7 +9219,7 @@
       </p:sp>
       <p:pic>
         <p:nvPicPr>
-          <p:cNvPr id="3" name="Image 0" descr="/work/_shared/assets/logo-candidate-2.png">    </p:cNvPr>
+          <p:cNvPr id="3" name="Image 0" descr="/tmp/pcwork/api-patterns-and-practices-graphql/presentation/_shared/assets/logo-candidate-2.png">    </p:cNvPr>
           <p:cNvPicPr>
             <a:picLocks noChangeAspect="1"/>
           </p:cNvPicPr>
@@ -9910,7 +9999,7 @@
       </p:sp>
       <p:pic>
         <p:nvPicPr>
-          <p:cNvPr id="3" name="Image 0" descr="/work/_shared/assets/logo-candidate-2.png">    </p:cNvPr>
+          <p:cNvPr id="3" name="Image 0" descr="/tmp/pcwork/api-patterns-and-practices-graphql/presentation/_shared/assets/logo-candidate-2.png">    </p:cNvPr>
           <p:cNvPicPr>
             <a:picLocks noChangeAspect="1"/>
           </p:cNvPicPr>
@@ -10510,7 +10599,7 @@
       </p:sp>
       <p:pic>
         <p:nvPicPr>
-          <p:cNvPr id="3" name="Image 0" descr="/work/_shared/assets/logo-candidate-2.png">    </p:cNvPr>
+          <p:cNvPr id="3" name="Image 0" descr="/tmp/pcwork/api-patterns-and-practices-graphql/presentation/_shared/assets/logo-candidate-2.png">    </p:cNvPr>
           <p:cNvPicPr>
             <a:picLocks noChangeAspect="1"/>
           </p:cNvPicPr>
@@ -11350,7 +11439,7 @@
       </p:sp>
       <p:pic>
         <p:nvPicPr>
-          <p:cNvPr id="5" name="Image 0" descr="/work/_shared/assets/redhat-logo-white.png">    </p:cNvPr>
+          <p:cNvPr id="5" name="Image 0" descr="/tmp/pcwork/api-patterns-and-practices-graphql/presentation/_shared/assets/redhat-logo-white.png">    </p:cNvPr>
           <p:cNvPicPr>
             <a:picLocks noChangeAspect="1"/>
           </p:cNvPicPr>
@@ -11438,7 +11527,7 @@
       </p:sp>
       <p:pic>
         <p:nvPicPr>
-          <p:cNvPr id="3" name="Image 0" descr="/work/_shared/assets/logo-candidate-2.png">    </p:cNvPr>
+          <p:cNvPr id="3" name="Image 0" descr="/tmp/pcwork/api-patterns-and-practices-graphql/presentation/_shared/assets/logo-candidate-2.png">    </p:cNvPr>
           <p:cNvPicPr>
             <a:picLocks noChangeAspect="1"/>
           </p:cNvPicPr>
@@ -12128,7 +12217,7 @@
       </p:sp>
       <p:pic>
         <p:nvPicPr>
-          <p:cNvPr id="3" name="Image 0" descr="/work/_shared/assets/logo-candidate-2.png">    </p:cNvPr>
+          <p:cNvPr id="3" name="Image 0" descr="/tmp/pcwork/api-patterns-and-practices-graphql/presentation/_shared/assets/logo-candidate-2.png">    </p:cNvPr>
           <p:cNvPicPr>
             <a:picLocks noChangeAspect="1"/>
           </p:cNvPicPr>
@@ -12626,7 +12715,7 @@
       </p:sp>
       <p:pic>
         <p:nvPicPr>
-          <p:cNvPr id="3" name="Image 0" descr="/work/_shared/assets/logo-candidate-2.png">    </p:cNvPr>
+          <p:cNvPr id="3" name="Image 0" descr="/tmp/pcwork/api-patterns-and-practices-graphql/presentation/_shared/assets/logo-candidate-2.png">    </p:cNvPr>
           <p:cNvPicPr>
             <a:picLocks noChangeAspect="1"/>
           </p:cNvPicPr>
@@ -13352,7 +13441,7 @@
       </p:sp>
       <p:pic>
         <p:nvPicPr>
-          <p:cNvPr id="3" name="Image 0" descr="/work/_shared/assets/logo-candidate-2.png">    </p:cNvPr>
+          <p:cNvPr id="3" name="Image 0" descr="/tmp/pcwork/api-patterns-and-practices-graphql/presentation/_shared/assets/logo-candidate-2.png">    </p:cNvPr>
           <p:cNvPicPr>
             <a:picLocks noChangeAspect="1"/>
           </p:cNvPicPr>
@@ -14006,7 +14095,7 @@
       </p:sp>
       <p:pic>
         <p:nvPicPr>
-          <p:cNvPr id="3" name="Image 0" descr="/work/_shared/assets/logo-candidate-2.png">    </p:cNvPr>
+          <p:cNvPr id="3" name="Image 0" descr="/tmp/pcwork/api-patterns-and-practices-graphql/presentation/_shared/assets/logo-candidate-2.png">    </p:cNvPr>
           <p:cNvPicPr>
             <a:picLocks noChangeAspect="1"/>
           </p:cNvPicPr>
@@ -14108,7 +14197,7 @@
       </p:sp>
       <p:pic>
         <p:nvPicPr>
-          <p:cNvPr id="6" name="Image 1" descr="/work/_shared/png/09-error-masking.png">    </p:cNvPr>
+          <p:cNvPr id="6" name="Image 1" descr="/tmp/pcwork/api-patterns-and-practices-graphql/presentation/_shared/png/09-error-masking.png">    </p:cNvPr>
           <p:cNvPicPr>
             <a:picLocks noChangeAspect="1"/>
           </p:cNvPicPr>
@@ -14312,7 +14401,7 @@
       </p:sp>
       <p:pic>
         <p:nvPicPr>
-          <p:cNvPr id="5" name="Image 0" descr="/work/_shared/assets/redhat-logo-white.png">    </p:cNvPr>
+          <p:cNvPr id="5" name="Image 0" descr="/tmp/pcwork/api-patterns-and-practices-graphql/presentation/_shared/assets/redhat-logo-white.png">    </p:cNvPr>
           <p:cNvPicPr>
             <a:picLocks noChangeAspect="1"/>
           </p:cNvPicPr>
@@ -14400,7 +14489,7 @@
       </p:sp>
       <p:pic>
         <p:nvPicPr>
-          <p:cNvPr id="3" name="Image 0" descr="/work/_shared/assets/logo-candidate-2.png">    </p:cNvPr>
+          <p:cNvPr id="3" name="Image 0" descr="/tmp/pcwork/api-patterns-and-practices-graphql/presentation/_shared/assets/logo-candidate-2.png">    </p:cNvPr>
           <p:cNvPicPr>
             <a:picLocks noChangeAspect="1"/>
           </p:cNvPicPr>
@@ -15018,7 +15107,7 @@
       </p:sp>
       <p:pic>
         <p:nvPicPr>
-          <p:cNvPr id="3" name="Image 0" descr="/work/_shared/assets/logo-candidate-2.png">    </p:cNvPr>
+          <p:cNvPr id="3" name="Image 0" descr="/tmp/pcwork/api-patterns-and-practices-graphql/presentation/_shared/assets/logo-candidate-2.png">    </p:cNvPr>
           <p:cNvPicPr>
             <a:picLocks noChangeAspect="1"/>
           </p:cNvPicPr>
@@ -15546,7 +15635,7 @@
       </p:sp>
       <p:pic>
         <p:nvPicPr>
-          <p:cNvPr id="3" name="Image 0" descr="/work/_shared/assets/logo-candidate-2.png">    </p:cNvPr>
+          <p:cNvPr id="3" name="Image 0" descr="/tmp/pcwork/api-patterns-and-practices-graphql/presentation/_shared/assets/logo-candidate-2.png">    </p:cNvPr>
           <p:cNvPicPr>
             <a:picLocks noChangeAspect="1"/>
           </p:cNvPicPr>
@@ -15648,7 +15737,7 @@
       </p:sp>
       <p:pic>
         <p:nvPicPr>
-          <p:cNvPr id="6" name="Image 1" descr="/work/_shared/png/11-deprecation-lifecycle.png">    </p:cNvPr>
+          <p:cNvPr id="6" name="Image 1" descr="/tmp/pcwork/api-patterns-and-practices-graphql/presentation/_shared/png/11-deprecation-lifecycle.png">    </p:cNvPr>
           <p:cNvPicPr>
             <a:picLocks noChangeAspect="1"/>
           </p:cNvPicPr>
@@ -15852,7 +15941,7 @@
       </p:sp>
       <p:pic>
         <p:nvPicPr>
-          <p:cNvPr id="5" name="Image 0" descr="/work/_shared/assets/redhat-logo-white.png">    </p:cNvPr>
+          <p:cNvPr id="5" name="Image 0" descr="/tmp/pcwork/api-patterns-and-practices-graphql/presentation/_shared/assets/redhat-logo-white.png">    </p:cNvPr>
           <p:cNvPicPr>
             <a:picLocks noChangeAspect="1"/>
           </p:cNvPicPr>
@@ -15940,7 +16029,7 @@
       </p:sp>
       <p:pic>
         <p:nvPicPr>
-          <p:cNvPr id="3" name="Image 0" descr="/work/_shared/assets/logo-candidate-2.png">    </p:cNvPr>
+          <p:cNvPr id="3" name="Image 0" descr="/tmp/pcwork/api-patterns-and-practices-graphql/presentation/_shared/assets/logo-candidate-2.png">    </p:cNvPr>
           <p:cNvPicPr>
             <a:picLocks noChangeAspect="1"/>
           </p:cNvPicPr>
@@ -16702,7 +16791,7 @@
       </p:sp>
       <p:pic>
         <p:nvPicPr>
-          <p:cNvPr id="3" name="Image 0" descr="/work/_shared/assets/logo-candidate-2.png">    </p:cNvPr>
+          <p:cNvPr id="3" name="Image 0" descr="/tmp/pcwork/api-patterns-and-practices-graphql/presentation/_shared/assets/logo-candidate-2.png">    </p:cNvPr>
           <p:cNvPicPr>
             <a:picLocks noChangeAspect="1"/>
           </p:cNvPicPr>
@@ -17410,7 +17499,7 @@
       </p:sp>
       <p:pic>
         <p:nvPicPr>
-          <p:cNvPr id="3" name="Image 0" descr="/work/_shared/assets/logo-candidate-2.png">    </p:cNvPr>
+          <p:cNvPr id="3" name="Image 0" descr="/tmp/pcwork/api-patterns-and-practices-graphql/presentation/_shared/assets/logo-candidate-2.png">    </p:cNvPr>
           <p:cNvPicPr>
             <a:picLocks noChangeAspect="1"/>
           </p:cNvPicPr>
@@ -17757,7 +17846,7 @@
       </p:sp>
       <p:pic>
         <p:nvPicPr>
-          <p:cNvPr id="3" name="Image 0" descr="/work/_shared/assets/logo-candidate-2.png">    </p:cNvPr>
+          <p:cNvPr id="3" name="Image 0" descr="/tmp/pcwork/api-patterns-and-practices-graphql/presentation/_shared/assets/logo-candidate-2.png">    </p:cNvPr>
           <p:cNvPicPr>
             <a:picLocks noChangeAspect="1"/>
           </p:cNvPicPr>
@@ -18411,7 +18500,7 @@
       </p:sp>
       <p:pic>
         <p:nvPicPr>
-          <p:cNvPr id="3" name="Image 0" descr="/work/_shared/assets/logo-candidate-2.png">    </p:cNvPr>
+          <p:cNvPr id="3" name="Image 0" descr="/tmp/pcwork/api-patterns-and-practices-graphql/presentation/_shared/assets/logo-candidate-2.png">    </p:cNvPr>
           <p:cNvPicPr>
             <a:picLocks noChangeAspect="1"/>
           </p:cNvPicPr>
@@ -18513,7 +18602,7 @@
       </p:sp>
       <p:pic>
         <p:nvPicPr>
-          <p:cNvPr id="6" name="Image 1" descr="/work/_shared/png/13-dataloader-tick.png">    </p:cNvPr>
+          <p:cNvPr id="6" name="Image 1" descr="/tmp/pcwork/api-patterns-and-practices-graphql/presentation/_shared/png/13-dataloader-tick.png">    </p:cNvPr>
           <p:cNvPicPr>
             <a:picLocks noChangeAspect="1"/>
           </p:cNvPicPr>
@@ -18717,7 +18806,7 @@
       </p:sp>
       <p:pic>
         <p:nvPicPr>
-          <p:cNvPr id="5" name="Image 0" descr="/work/_shared/assets/redhat-logo-white.png">    </p:cNvPr>
+          <p:cNvPr id="5" name="Image 0" descr="/tmp/pcwork/api-patterns-and-practices-graphql/presentation/_shared/assets/redhat-logo-white.png">    </p:cNvPr>
           <p:cNvPicPr>
             <a:picLocks noChangeAspect="1"/>
           </p:cNvPicPr>
@@ -18805,7 +18894,7 @@
       </p:sp>
       <p:pic>
         <p:nvPicPr>
-          <p:cNvPr id="3" name="Image 0" descr="/work/_shared/assets/logo-candidate-2.png">    </p:cNvPr>
+          <p:cNvPr id="3" name="Image 0" descr="/tmp/pcwork/api-patterns-and-practices-graphql/presentation/_shared/assets/logo-candidate-2.png">    </p:cNvPr>
           <p:cNvPicPr>
             <a:picLocks noChangeAspect="1"/>
           </p:cNvPicPr>
@@ -18907,7 +18996,7 @@
       </p:sp>
       <p:pic>
         <p:nvPicPr>
-          <p:cNvPr id="6" name="Image 1" descr="/work/_shared/png/14-limit-pipeline.png">    </p:cNvPr>
+          <p:cNvPr id="6" name="Image 1" descr="/tmp/pcwork/api-patterns-and-practices-graphql/presentation/_shared/png/14-limit-pipeline.png">    </p:cNvPr>
           <p:cNvPicPr>
             <a:picLocks noChangeAspect="1"/>
           </p:cNvPicPr>
@@ -19033,7 +19122,7 @@
       </p:sp>
       <p:pic>
         <p:nvPicPr>
-          <p:cNvPr id="3" name="Image 0" descr="/work/_shared/assets/logo-candidate-2.png">    </p:cNvPr>
+          <p:cNvPr id="3" name="Image 0" descr="/tmp/pcwork/api-patterns-and-practices-graphql/presentation/_shared/assets/logo-candidate-2.png">    </p:cNvPr>
           <p:cNvPicPr>
             <a:picLocks noChangeAspect="1"/>
           </p:cNvPicPr>
@@ -19489,7 +19578,7 @@
       </p:sp>
       <p:pic>
         <p:nvPicPr>
-          <p:cNvPr id="3" name="Image 0" descr="/work/_shared/assets/logo-candidate-2.png">    </p:cNvPr>
+          <p:cNvPr id="3" name="Image 0" descr="/tmp/pcwork/api-patterns-and-practices-graphql/presentation/_shared/assets/logo-candidate-2.png">    </p:cNvPr>
           <p:cNvPicPr>
             <a:picLocks noChangeAspect="1"/>
           </p:cNvPicPr>
@@ -20233,7 +20322,7 @@
       </p:sp>
       <p:pic>
         <p:nvPicPr>
-          <p:cNvPr id="3" name="Image 0" descr="/work/_shared/assets/logo-candidate-2.png">    </p:cNvPr>
+          <p:cNvPr id="3" name="Image 0" descr="/tmp/pcwork/api-patterns-and-practices-graphql/presentation/_shared/assets/logo-candidate-2.png">    </p:cNvPr>
           <p:cNvPicPr>
             <a:picLocks noChangeAspect="1"/>
           </p:cNvPicPr>
@@ -20335,7 +20424,7 @@
       </p:sp>
       <p:pic>
         <p:nvPicPr>
-          <p:cNvPr id="6" name="Image 1" descr="/work/_shared/png/15-persisted-document-seam.png">    </p:cNvPr>
+          <p:cNvPr id="6" name="Image 1" descr="/tmp/pcwork/api-patterns-and-practices-graphql/presentation/_shared/png/15-persisted-document-seam.png">    </p:cNvPr>
           <p:cNvPicPr>
             <a:picLocks noChangeAspect="1"/>
           </p:cNvPicPr>
@@ -20461,7 +20550,7 @@
       </p:sp>
       <p:pic>
         <p:nvPicPr>
-          <p:cNvPr id="3" name="Image 0" descr="/work/_shared/assets/logo-candidate-2.png">    </p:cNvPr>
+          <p:cNvPr id="3" name="Image 0" descr="/tmp/pcwork/api-patterns-and-practices-graphql/presentation/_shared/assets/logo-candidate-2.png">    </p:cNvPr>
           <p:cNvPicPr>
             <a:picLocks noChangeAspect="1"/>
           </p:cNvPicPr>
@@ -21223,7 +21312,7 @@
       </p:sp>
       <p:pic>
         <p:nvPicPr>
-          <p:cNvPr id="3" name="Image 0" descr="/work/_shared/assets/logo-candidate-2.png">    </p:cNvPr>
+          <p:cNvPr id="3" name="Image 0" descr="/tmp/pcwork/api-patterns-and-practices-graphql/presentation/_shared/assets/logo-candidate-2.png">    </p:cNvPr>
           <p:cNvPicPr>
             <a:picLocks noChangeAspect="1"/>
           </p:cNvPicPr>
@@ -22063,7 +22152,7 @@
       </p:sp>
       <p:pic>
         <p:nvPicPr>
-          <p:cNvPr id="5" name="Image 0" descr="/work/_shared/assets/redhat-logo-white.png">    </p:cNvPr>
+          <p:cNvPr id="5" name="Image 0" descr="/tmp/pcwork/api-patterns-and-practices-graphql/presentation/_shared/assets/redhat-logo-white.png">    </p:cNvPr>
           <p:cNvPicPr>
             <a:picLocks noChangeAspect="1"/>
           </p:cNvPicPr>
@@ -22229,7 +22318,7 @@
       </p:sp>
       <p:pic>
         <p:nvPicPr>
-          <p:cNvPr id="5" name="Image 0" descr="/work/_shared/assets/redhat-logo-white.png">    </p:cNvPr>
+          <p:cNvPr id="5" name="Image 0" descr="/tmp/pcwork/api-patterns-and-practices-graphql/presentation/_shared/assets/redhat-logo-white.png">    </p:cNvPr>
           <p:cNvPicPr>
             <a:picLocks noChangeAspect="1"/>
           </p:cNvPicPr>
@@ -22317,7 +22406,7 @@
       </p:sp>
       <p:pic>
         <p:nvPicPr>
-          <p:cNvPr id="3" name="Image 0" descr="/work/_shared/assets/logo-candidate-2.png">    </p:cNvPr>
+          <p:cNvPr id="3" name="Image 0" descr="/tmp/pcwork/api-patterns-and-practices-graphql/presentation/_shared/assets/logo-candidate-2.png">    </p:cNvPr>
           <p:cNvPicPr>
             <a:picLocks noChangeAspect="1"/>
           </p:cNvPicPr>
@@ -22755,7 +22844,7 @@
       </p:sp>
       <p:pic>
         <p:nvPicPr>
-          <p:cNvPr id="3" name="Image 0" descr="/work/_shared/assets/logo-candidate-2.png">    </p:cNvPr>
+          <p:cNvPr id="3" name="Image 0" descr="/tmp/pcwork/api-patterns-and-practices-graphql/presentation/_shared/assets/logo-candidate-2.png">    </p:cNvPr>
           <p:cNvPicPr>
             <a:picLocks noChangeAspect="1"/>
           </p:cNvPicPr>
@@ -23301,7 +23390,7 @@
       </p:sp>
       <p:pic>
         <p:nvPicPr>
-          <p:cNvPr id="3" name="Image 0" descr="/work/_shared/assets/logo-candidate-2.png">    </p:cNvPr>
+          <p:cNvPr id="3" name="Image 0" descr="/tmp/pcwork/api-patterns-and-practices-graphql/presentation/_shared/assets/logo-candidate-2.png">    </p:cNvPr>
           <p:cNvPicPr>
             <a:picLocks noChangeAspect="1"/>
           </p:cNvPicPr>
@@ -24045,7 +24134,7 @@
       </p:sp>
       <p:pic>
         <p:nvPicPr>
-          <p:cNvPr id="3" name="Image 0" descr="/work/_shared/assets/logo-candidate-2.png">    </p:cNvPr>
+          <p:cNvPr id="3" name="Image 0" descr="/tmp/pcwork/api-patterns-and-practices-graphql/presentation/_shared/assets/logo-candidate-2.png">    </p:cNvPr>
           <p:cNvPicPr>
             <a:picLocks noChangeAspect="1"/>
           </p:cNvPicPr>
@@ -24705,7 +24794,7 @@
       </p:sp>
       <p:pic>
         <p:nvPicPr>
-          <p:cNvPr id="5" name="Image 0" descr="/work/_shared/assets/redhat-logo-white.png">    </p:cNvPr>
+          <p:cNvPr id="5" name="Image 0" descr="/tmp/pcwork/api-patterns-and-practices-graphql/presentation/_shared/assets/redhat-logo-white.png">    </p:cNvPr>
           <p:cNvPicPr>
             <a:picLocks noChangeAspect="1"/>
           </p:cNvPicPr>
@@ -24793,7 +24882,7 @@
       </p:sp>
       <p:pic>
         <p:nvPicPr>
-          <p:cNvPr id="3" name="Image 0" descr="/work/_shared/assets/logo-candidate-2.png">    </p:cNvPr>
+          <p:cNvPr id="3" name="Image 0" descr="/tmp/pcwork/api-patterns-and-practices-graphql/presentation/_shared/assets/logo-candidate-2.png">    </p:cNvPr>
           <p:cNvPicPr>
             <a:picLocks noChangeAspect="1"/>
           </p:cNvPicPr>
@@ -24895,7 +24984,7 @@
       </p:sp>
       <p:pic>
         <p:nvPicPr>
-          <p:cNvPr id="6" name="Image 1" descr="/work/_shared/png/19-telemetry-pipeline.png">    </p:cNvPr>
+          <p:cNvPr id="6" name="Image 1" descr="/tmp/pcwork/api-patterns-and-practices-graphql/presentation/_shared/png/19-telemetry-pipeline.png">    </p:cNvPr>
           <p:cNvPicPr>
             <a:picLocks noChangeAspect="1"/>
           </p:cNvPicPr>
@@ -25021,7 +25110,7 @@
       </p:sp>
       <p:pic>
         <p:nvPicPr>
-          <p:cNvPr id="3" name="Image 0" descr="/work/_shared/assets/logo-candidate-2.png">    </p:cNvPr>
+          <p:cNvPr id="3" name="Image 0" descr="/tmp/pcwork/api-patterns-and-practices-graphql/presentation/_shared/assets/logo-candidate-2.png">    </p:cNvPr>
           <p:cNvPicPr>
             <a:picLocks noChangeAspect="1"/>
           </p:cNvPicPr>
@@ -25711,7 +25800,7 @@
       </p:sp>
       <p:pic>
         <p:nvPicPr>
-          <p:cNvPr id="3" name="Image 0" descr="/work/_shared/assets/logo-candidate-2.png">    </p:cNvPr>
+          <p:cNvPr id="3" name="Image 0" descr="/tmp/pcwork/api-patterns-and-practices-graphql/presentation/_shared/assets/logo-candidate-2.png">    </p:cNvPr>
           <p:cNvPicPr>
             <a:picLocks noChangeAspect="1"/>
           </p:cNvPicPr>
@@ -26419,7 +26508,7 @@
       </p:sp>
       <p:pic>
         <p:nvPicPr>
-          <p:cNvPr id="3" name="Image 0" descr="/work/_shared/assets/logo-candidate-2.png">    </p:cNvPr>
+          <p:cNvPr id="3" name="Image 0" descr="/tmp/pcwork/api-patterns-and-practices-graphql/presentation/_shared/assets/logo-candidate-2.png">    </p:cNvPr>
           <p:cNvPicPr>
             <a:picLocks noChangeAspect="1"/>
           </p:cNvPicPr>
@@ -26521,7 +26610,7 @@
       </p:sp>
       <p:pic>
         <p:nvPicPr>
-          <p:cNvPr id="6" name="Image 1" descr="/work/_shared/png/20-cross-stack-topology.png">    </p:cNvPr>
+          <p:cNvPr id="6" name="Image 1" descr="/tmp/pcwork/api-patterns-and-practices-graphql/presentation/_shared/png/20-cross-stack-topology.png">    </p:cNvPr>
           <p:cNvPicPr>
             <a:picLocks noChangeAspect="1"/>
           </p:cNvPicPr>
@@ -26725,7 +26814,7 @@
       </p:sp>
       <p:pic>
         <p:nvPicPr>
-          <p:cNvPr id="5" name="Image 0" descr="/work/_shared/assets/redhat-logo-white.png">    </p:cNvPr>
+          <p:cNvPr id="5" name="Image 0" descr="/tmp/pcwork/api-patterns-and-practices-graphql/presentation/_shared/assets/redhat-logo-white.png">    </p:cNvPr>
           <p:cNvPicPr>
             <a:picLocks noChangeAspect="1"/>
           </p:cNvPicPr>
@@ -26813,7 +26902,7 @@
       </p:sp>
       <p:pic>
         <p:nvPicPr>
-          <p:cNvPr id="3" name="Image 0" descr="/work/_shared/assets/logo-candidate-2.png">    </p:cNvPr>
+          <p:cNvPr id="3" name="Image 0" descr="/tmp/pcwork/api-patterns-and-practices-graphql/presentation/_shared/assets/logo-candidate-2.png">    </p:cNvPr>
           <p:cNvPicPr>
             <a:picLocks noChangeAspect="1"/>
           </p:cNvPicPr>
@@ -26915,7 +27004,7 @@
       </p:sp>
       <p:pic>
         <p:nvPicPr>
-          <p:cNvPr id="6" name="Image 1" descr="/work/_shared/png/00-lab-topology.png">    </p:cNvPr>
+          <p:cNvPr id="6" name="Image 1" descr="/tmp/pcwork/api-patterns-and-practices-graphql/presentation/_shared/png/00-lab-topology.png">    </p:cNvPr>
           <p:cNvPicPr>
             <a:picLocks noChangeAspect="1"/>
           </p:cNvPicPr>
@@ -27041,7 +27130,7 @@
       </p:sp>
       <p:pic>
         <p:nvPicPr>
-          <p:cNvPr id="3" name="Image 0" descr="/work/_shared/assets/logo-candidate-2.png">    </p:cNvPr>
+          <p:cNvPr id="3" name="Image 0" descr="/tmp/pcwork/api-patterns-and-practices-graphql/presentation/_shared/assets/logo-candidate-2.png">    </p:cNvPr>
           <p:cNvPicPr>
             <a:picLocks noChangeAspect="1"/>
           </p:cNvPicPr>
@@ -27767,7 +27856,7 @@
       </p:sp>
       <p:pic>
         <p:nvPicPr>
-          <p:cNvPr id="3" name="Image 0" descr="/work/_shared/assets/logo-candidate-2.png">    </p:cNvPr>
+          <p:cNvPr id="3" name="Image 0" descr="/tmp/pcwork/api-patterns-and-practices-graphql/presentation/_shared/assets/logo-candidate-2.png">    </p:cNvPr>
           <p:cNvPicPr>
             <a:picLocks noChangeAspect="1"/>
           </p:cNvPicPr>
@@ -28259,7 +28348,7 @@
       </p:sp>
       <p:pic>
         <p:nvPicPr>
-          <p:cNvPr id="3" name="Image 0" descr="/work/_shared/assets/logo-candidate-2.png">    </p:cNvPr>
+          <p:cNvPr id="3" name="Image 0" descr="/tmp/pcwork/api-patterns-and-practices-graphql/presentation/_shared/assets/logo-candidate-2.png">    </p:cNvPr>
           <p:cNvPicPr>
             <a:picLocks noChangeAspect="1"/>
           </p:cNvPicPr>
@@ -29063,7 +29152,7 @@
       </p:sp>
       <p:pic>
         <p:nvPicPr>
-          <p:cNvPr id="5" name="Image 0" descr="/work/_shared/assets/redhat-logo-white.png">    </p:cNvPr>
+          <p:cNvPr id="5" name="Image 0" descr="/tmp/pcwork/api-patterns-and-practices-graphql/presentation/_shared/assets/redhat-logo-white.png">    </p:cNvPr>
           <p:cNvPicPr>
             <a:picLocks noChangeAspect="1"/>
           </p:cNvPicPr>
@@ -29151,7 +29240,7 @@
       </p:sp>
       <p:pic>
         <p:nvPicPr>
-          <p:cNvPr id="3" name="Image 0" descr="/work/_shared/assets/logo-candidate-2.png">    </p:cNvPr>
+          <p:cNvPr id="3" name="Image 0" descr="/tmp/pcwork/api-patterns-and-practices-graphql/presentation/_shared/assets/logo-candidate-2.png">    </p:cNvPr>
           <p:cNvPicPr>
             <a:picLocks noChangeAspect="1"/>
           </p:cNvPicPr>
@@ -29253,7 +29342,7 @@
       </p:sp>
       <p:pic>
         <p:nvPicPr>
-          <p:cNvPr id="6" name="Image 1" descr="/work/_shared/png/23-test-layers.png">    </p:cNvPr>
+          <p:cNvPr id="6" name="Image 1" descr="/tmp/pcwork/api-patterns-and-practices-graphql/presentation/_shared/png/23-test-layers.png">    </p:cNvPr>
           <p:cNvPicPr>
             <a:picLocks noChangeAspect="1"/>
           </p:cNvPicPr>
@@ -29379,7 +29468,7 @@
       </p:sp>
       <p:pic>
         <p:nvPicPr>
-          <p:cNvPr id="3" name="Image 0" descr="/work/_shared/assets/logo-candidate-2.png">    </p:cNvPr>
+          <p:cNvPr id="3" name="Image 0" descr="/tmp/pcwork/api-patterns-and-practices-graphql/presentation/_shared/assets/logo-candidate-2.png">    </p:cNvPr>
           <p:cNvPicPr>
             <a:picLocks noChangeAspect="1"/>
           </p:cNvPicPr>
@@ -29853,7 +29942,7 @@
       </p:sp>
       <p:pic>
         <p:nvPicPr>
-          <p:cNvPr id="3" name="Image 0" descr="/work/_shared/assets/logo-candidate-2.png">    </p:cNvPr>
+          <p:cNvPr id="3" name="Image 0" descr="/tmp/pcwork/api-patterns-and-practices-graphql/presentation/_shared/assets/logo-candidate-2.png">    </p:cNvPr>
           <p:cNvPicPr>
             <a:picLocks noChangeAspect="1"/>
           </p:cNvPicPr>
@@ -30435,7 +30524,7 @@
       </p:sp>
       <p:pic>
         <p:nvPicPr>
-          <p:cNvPr id="3" name="Image 0" descr="/work/_shared/assets/logo-candidate-2.png">    </p:cNvPr>
+          <p:cNvPr id="3" name="Image 0" descr="/tmp/pcwork/api-patterns-and-practices-graphql/presentation/_shared/assets/logo-candidate-2.png">    </p:cNvPr>
           <p:cNvPicPr>
             <a:picLocks noChangeAspect="1"/>
           </p:cNvPicPr>
@@ -30537,7 +30626,7 @@
       </p:sp>
       <p:pic>
         <p:nvPicPr>
-          <p:cNvPr id="6" name="Image 1" descr="/work/_shared/png/24-dev-vs-prod-surfaces.png">    </p:cNvPr>
+          <p:cNvPr id="6" name="Image 1" descr="/tmp/pcwork/api-patterns-and-practices-graphql/presentation/_shared/png/24-dev-vs-prod-surfaces.png">    </p:cNvPr>
           <p:cNvPicPr>
             <a:picLocks noChangeAspect="1"/>
           </p:cNvPicPr>
@@ -30741,7 +30830,7 @@
       </p:sp>
       <p:pic>
         <p:nvPicPr>
-          <p:cNvPr id="5" name="Image 0" descr="/work/_shared/assets/redhat-logo-white.png">    </p:cNvPr>
+          <p:cNvPr id="5" name="Image 0" descr="/tmp/pcwork/api-patterns-and-practices-graphql/presentation/_shared/assets/redhat-logo-white.png">    </p:cNvPr>
           <p:cNvPicPr>
             <a:picLocks noChangeAspect="1"/>
           </p:cNvPicPr>
@@ -30829,7 +30918,7 @@
       </p:sp>
       <p:pic>
         <p:nvPicPr>
-          <p:cNvPr id="3" name="Image 0" descr="/work/_shared/assets/logo-candidate-2.png">    </p:cNvPr>
+          <p:cNvPr id="3" name="Image 0" descr="/tmp/pcwork/api-patterns-and-practices-graphql/presentation/_shared/assets/logo-candidate-2.png">    </p:cNvPr>
           <p:cNvPicPr>
             <a:picLocks noChangeAspect="1"/>
           </p:cNvPicPr>
@@ -31501,7 +31590,7 @@
       </p:sp>
       <p:pic>
         <p:nvPicPr>
-          <p:cNvPr id="3" name="Image 0" descr="/work/_shared/assets/logo-candidate-2.png">    </p:cNvPr>
+          <p:cNvPr id="3" name="Image 0" descr="/tmp/pcwork/api-patterns-and-practices-graphql/presentation/_shared/assets/logo-candidate-2.png">    </p:cNvPr>
           <p:cNvPicPr>
             <a:picLocks noChangeAspect="1"/>
           </p:cNvPicPr>
@@ -32047,7 +32136,7 @@
       </p:sp>
       <p:pic>
         <p:nvPicPr>
-          <p:cNvPr id="3" name="Image 0" descr="/work/_shared/assets/logo-candidate-2.png">    </p:cNvPr>
+          <p:cNvPr id="3" name="Image 0" descr="/tmp/pcwork/api-patterns-and-practices-graphql/presentation/_shared/assets/logo-candidate-2.png">    </p:cNvPr>
           <p:cNvPicPr>
             <a:picLocks noChangeAspect="1"/>
           </p:cNvPicPr>
@@ -32629,7 +32718,7 @@
       </p:sp>
       <p:pic>
         <p:nvPicPr>
-          <p:cNvPr id="3" name="Image 0" descr="/work/_shared/assets/logo-candidate-2.png">    </p:cNvPr>
+          <p:cNvPr id="3" name="Image 0" descr="/tmp/pcwork/api-patterns-and-practices-graphql/presentation/_shared/assets/logo-candidate-2.png">    </p:cNvPr>
           <p:cNvPicPr>
             <a:picLocks noChangeAspect="1"/>
           </p:cNvPicPr>
@@ -32731,7 +32820,7 @@
       </p:sp>
       <p:pic>
         <p:nvPicPr>
-          <p:cNvPr id="6" name="Image 1" descr="/work/_shared/png/25-compose-tier-topology.png">    </p:cNvPr>
+          <p:cNvPr id="6" name="Image 1" descr="/tmp/pcwork/api-patterns-and-practices-graphql/presentation/_shared/png/25-compose-tier-topology.png">    </p:cNvPr>
           <p:cNvPicPr>
             <a:picLocks noChangeAspect="1"/>
           </p:cNvPicPr>
@@ -32857,7 +32946,7 @@
       </p:sp>
       <p:pic>
         <p:nvPicPr>
-          <p:cNvPr id="3" name="Image 0" descr="/work/_shared/assets/logo-candidate-2.png">    </p:cNvPr>
+          <p:cNvPr id="3" name="Image 0" descr="/tmp/pcwork/api-patterns-and-practices-graphql/presentation/_shared/assets/logo-candidate-2.png">    </p:cNvPr>
           <p:cNvPicPr>
             <a:picLocks noChangeAspect="1"/>
           </p:cNvPicPr>
@@ -33583,7 +33672,7 @@
       </p:sp>
       <p:pic>
         <p:nvPicPr>
-          <p:cNvPr id="3" name="Image 0" descr="/work/_shared/assets/logo-candidate-2.png">    </p:cNvPr>
+          <p:cNvPr id="3" name="Image 0" descr="/tmp/pcwork/api-patterns-and-practices-graphql/presentation/_shared/assets/logo-candidate-2.png">    </p:cNvPr>
           <p:cNvPicPr>
             <a:picLocks noChangeAspect="1"/>
           </p:cNvPicPr>
@@ -33930,7 +34019,7 @@
       </p:sp>
       <p:pic>
         <p:nvPicPr>
-          <p:cNvPr id="3" name="Image 0" descr="/work/_shared/assets/logo-candidate-2.png">    </p:cNvPr>
+          <p:cNvPr id="3" name="Image 0" descr="/tmp/pcwork/api-patterns-and-practices-graphql/presentation/_shared/assets/logo-candidate-2.png">    </p:cNvPr>
           <p:cNvPicPr>
             <a:picLocks noChangeAspect="1"/>
           </p:cNvPicPr>
@@ -34331,7 +34420,7 @@
       </p:sp>
       <p:pic>
         <p:nvPicPr>
-          <p:cNvPr id="5" name="Image 0" descr="/work/_shared/assets/redhat-logo-white.png">    </p:cNvPr>
+          <p:cNvPr id="5" name="Image 0" descr="/tmp/pcwork/api-patterns-and-practices-graphql/presentation/_shared/assets/redhat-logo-white.png">    </p:cNvPr>
           <p:cNvPicPr>
             <a:picLocks noChangeAspect="1"/>
           </p:cNvPicPr>
@@ -34419,7 +34508,7 @@
       </p:sp>
       <p:pic>
         <p:nvPicPr>
-          <p:cNvPr id="3" name="Image 0" descr="/work/_shared/assets/logo-candidate-2.png">    </p:cNvPr>
+          <p:cNvPr id="3" name="Image 0" descr="/tmp/pcwork/api-patterns-and-practices-graphql/presentation/_shared/assets/logo-candidate-2.png">    </p:cNvPr>
           <p:cNvPicPr>
             <a:picLocks noChangeAspect="1"/>
           </p:cNvPicPr>
@@ -35163,7 +35252,7 @@
       </p:sp>
       <p:pic>
         <p:nvPicPr>
-          <p:cNvPr id="3" name="Image 0" descr="/work/_shared/assets/logo-candidate-2.png">    </p:cNvPr>
+          <p:cNvPr id="3" name="Image 0" descr="/tmp/pcwork/api-patterns-and-practices-graphql/presentation/_shared/assets/logo-candidate-2.png">    </p:cNvPr>
           <p:cNvPicPr>
             <a:picLocks noChangeAspect="1"/>
           </p:cNvPicPr>
@@ -35925,7 +36014,7 @@
       </p:sp>
       <p:pic>
         <p:nvPicPr>
-          <p:cNvPr id="3" name="Image 0" descr="/work/_shared/assets/logo-candidate-2.png">    </p:cNvPr>
+          <p:cNvPr id="3" name="Image 0" descr="/tmp/pcwork/api-patterns-and-practices-graphql/presentation/_shared/assets/logo-candidate-2.png">    </p:cNvPr>
           <p:cNvPicPr>
             <a:picLocks noChangeAspect="1"/>
           </p:cNvPicPr>
@@ -36348,6 +36437,454 @@
               <a:t>The one function that decides whether a caller may see a cargo (excerpt).</a:t>
             </a:r>
             <a:endParaRPr lang="en-US" sz="1300" dirty="0"/>
+          </a:p>
+        </p:txBody>
+      </p:sp>
+    </p:spTree>
+  </p:cSld>
+  <p:clrMapOvr>
+    <a:masterClrMapping/>
+  </p:clrMapOvr>
+</p:sld>
+</file>
+
+<file path=ppt/slides/slide69.xml><?xml version="1.0" encoding="utf-8"?>
+<p:sld xmlns:a="http://schemas.openxmlformats.org/drawingml/2006/main" xmlns:r="http://schemas.openxmlformats.org/officeDocument/2006/relationships" xmlns:p="http://schemas.openxmlformats.org/presentationml/2006/main">
+  <p:cSld name="Slide 69">
+    <p:spTree>
+      <p:nvGrpSpPr>
+        <p:cNvPr id="1" name=""/>
+        <p:cNvGrpSpPr/>
+        <p:nvPr/>
+      </p:nvGrpSpPr>
+      <p:grpSpPr>
+        <a:xfrm>
+          <a:off x="0" y="0"/>
+          <a:ext cx="0" cy="0"/>
+          <a:chOff x="0" y="0"/>
+          <a:chExt cx="0" cy="0"/>
+        </a:xfrm>
+      </p:grpSpPr>
+      <p:sp>
+        <p:nvSpPr>
+          <p:cNvPr id="2" name="Text 0"/>
+          <p:cNvSpPr/>
+          <p:nvPr/>
+        </p:nvSpPr>
+        <p:spPr>
+          <a:xfrm>
+            <a:off x="566928" y="6364224"/>
+            <a:ext cx="914400" cy="274320"/>
+          </a:xfrm>
+          <a:prstGeom prst="rect">
+            <a:avLst/>
+          </a:prstGeom>
+          <a:noFill/>
+          <a:ln/>
+        </p:spPr>
+        <p:txBody>
+          <a:bodyPr wrap="square" rtlCol="0" anchor="ctr"/>
+          <a:lstStyle/>
+          <a:p>
+            <a:pPr algn="l" indent="0" marL="0">
+              <a:buNone/>
+            </a:pPr>
+            <a:r>
+              <a:rPr lang="en-US" sz="1000" dirty="0">
+                <a:solidFill>
+                  <a:srgbClr val="8A8A8A"/>
+                </a:solidFill>
+                <a:latin typeface="Red Hat Text" pitchFamily="34" charset="0"/>
+                <a:ea typeface="Red Hat Text" pitchFamily="34" charset="-122"/>
+                <a:cs typeface="Red Hat Text" pitchFamily="34" charset="-120"/>
+              </a:rPr>
+              <a:t>69</a:t>
+            </a:r>
+            <a:endParaRPr lang="en-US" sz="1000" dirty="0"/>
+          </a:p>
+        </p:txBody>
+      </p:sp>
+      <p:pic>
+        <p:nvPicPr>
+          <p:cNvPr id="3" name="Image 0" descr="/tmp/pcwork/api-patterns-and-practices-graphql/presentation/_shared/assets/logo-candidate-2.png">    </p:cNvPr>
+          <p:cNvPicPr>
+            <a:picLocks noChangeAspect="1"/>
+          </p:cNvPicPr>
+          <p:nvPr/>
+        </p:nvPicPr>
+        <p:blipFill>
+          <a:blip r:embed="rId1"/>
+          <a:stretch>
+            <a:fillRect/>
+          </a:stretch>
+        </p:blipFill>
+        <p:spPr>
+          <a:xfrm>
+            <a:off x="10561320" y="6355080"/>
+            <a:ext cx="1033272" cy="246888"/>
+          </a:xfrm>
+          <a:prstGeom prst="rect">
+            <a:avLst/>
+          </a:prstGeom>
+        </p:spPr>
+      </p:pic>
+      <p:sp>
+        <p:nvSpPr>
+          <p:cNvPr id="4" name="Text 1"/>
+          <p:cNvSpPr/>
+          <p:nvPr/>
+        </p:nvSpPr>
+        <p:spPr>
+          <a:xfrm>
+            <a:off x="566928" y="384048"/>
+            <a:ext cx="11055096" cy="292608"/>
+          </a:xfrm>
+          <a:prstGeom prst="rect">
+            <a:avLst/>
+          </a:prstGeom>
+          <a:noFill/>
+          <a:ln/>
+        </p:spPr>
+        <p:txBody>
+          <a:bodyPr wrap="square" rtlCol="0" anchor="ctr"/>
+          <a:lstStyle/>
+          <a:p>
+            <a:pPr algn="l" indent="0" marL="0">
+              <a:buNone/>
+            </a:pPr>
+            <a:r>
+              <a:rPr lang="en-US" sz="1200" b="1" spc="400" kern="0" dirty="0">
+                <a:solidFill>
+                  <a:srgbClr val="EE0000"/>
+                </a:solidFill>
+                <a:latin typeface="Red Hat Display" pitchFamily="34" charset="0"/>
+                <a:ea typeface="Red Hat Display" pitchFamily="34" charset="-122"/>
+                <a:cs typeface="Red Hat Display" pitchFamily="34" charset="-120"/>
+              </a:rPr>
+              <a:t>SCAN TO EXPLORE</a:t>
+            </a:r>
+            <a:endParaRPr lang="en-US" sz="1200" dirty="0"/>
+          </a:p>
+        </p:txBody>
+      </p:sp>
+      <p:sp>
+        <p:nvSpPr>
+          <p:cNvPr id="5" name="Text 2"/>
+          <p:cNvSpPr/>
+          <p:nvPr/>
+        </p:nvSpPr>
+        <p:spPr>
+          <a:xfrm>
+            <a:off x="566928" y="676656"/>
+            <a:ext cx="11055096" cy="1005840"/>
+          </a:xfrm>
+          <a:prstGeom prst="rect">
+            <a:avLst/>
+          </a:prstGeom>
+          <a:noFill/>
+          <a:ln/>
+        </p:spPr>
+        <p:txBody>
+          <a:bodyPr wrap="square" rtlCol="0" anchor="t"/>
+          <a:lstStyle/>
+          <a:p>
+            <a:pPr algn="l" indent="0" marL="0">
+              <a:buNone/>
+            </a:pPr>
+            <a:r>
+              <a:rPr lang="en-US" sz="3000" b="1" dirty="0">
+                <a:solidFill>
+                  <a:srgbClr val="151515"/>
+                </a:solidFill>
+                <a:latin typeface="Red Hat Display" pitchFamily="34" charset="0"/>
+                <a:ea typeface="Red Hat Display" pitchFamily="34" charset="-122"/>
+                <a:cs typeface="Red Hat Display" pitchFamily="34" charset="-120"/>
+              </a:rPr>
+              <a:t>Take it with you</a:t>
+            </a:r>
+            <a:endParaRPr lang="en-US" sz="3000" dirty="0"/>
+          </a:p>
+        </p:txBody>
+      </p:sp>
+      <p:pic>
+        <p:nvPicPr>
+          <p:cNvPr id="6" name="Image 1" descr="/tmp/pcwork/api-patterns-and-practices-graphql/presentation/_shared/assets/qr-graphql-site.png">    </p:cNvPr>
+          <p:cNvPicPr>
+            <a:picLocks noChangeAspect="1"/>
+          </p:cNvPicPr>
+          <p:nvPr/>
+        </p:nvPicPr>
+        <p:blipFill>
+          <a:blip r:embed="rId2"/>
+          <a:stretch>
+            <a:fillRect/>
+          </a:stretch>
+        </p:blipFill>
+        <p:spPr>
+          <a:xfrm>
+            <a:off x="2103120" y="1627632"/>
+            <a:ext cx="2834640" cy="2834640"/>
+          </a:xfrm>
+          <a:prstGeom prst="rect">
+            <a:avLst/>
+          </a:prstGeom>
+        </p:spPr>
+      </p:pic>
+      <p:sp>
+        <p:nvSpPr>
+          <p:cNvPr id="7" name="Text 3"/>
+          <p:cNvSpPr/>
+          <p:nvPr/>
+        </p:nvSpPr>
+        <p:spPr>
+          <a:xfrm>
+            <a:off x="1417320" y="4553712"/>
+            <a:ext cx="4206240" cy="365760"/>
+          </a:xfrm>
+          <a:prstGeom prst="rect">
+            <a:avLst/>
+          </a:prstGeom>
+          <a:noFill/>
+          <a:ln/>
+        </p:spPr>
+        <p:txBody>
+          <a:bodyPr wrap="square" rtlCol="0" anchor="ctr"/>
+          <a:lstStyle/>
+          <a:p>
+            <a:pPr algn="ctr" indent="0" marL="0">
+              <a:buNone/>
+            </a:pPr>
+            <a:r>
+              <a:rPr lang="en-US" sz="1800" b="1" dirty="0">
+                <a:solidFill>
+                  <a:srgbClr val="151515"/>
+                </a:solidFill>
+                <a:latin typeface="Red Hat Display" pitchFamily="34" charset="0"/>
+                <a:ea typeface="Red Hat Display" pitchFamily="34" charset="-122"/>
+                <a:cs typeface="Red Hat Display" pitchFamily="34" charset="-120"/>
+              </a:rPr>
+              <a:t>The site</a:t>
+            </a:r>
+            <a:endParaRPr lang="en-US" sz="1800" dirty="0"/>
+          </a:p>
+        </p:txBody>
+      </p:sp>
+      <p:sp>
+        <p:nvSpPr>
+          <p:cNvPr id="8" name="Text 4"/>
+          <p:cNvSpPr/>
+          <p:nvPr/>
+        </p:nvSpPr>
+        <p:spPr>
+          <a:xfrm>
+            <a:off x="1325880" y="4937760"/>
+            <a:ext cx="4389120" cy="658368"/>
+          </a:xfrm>
+          <a:prstGeom prst="rect">
+            <a:avLst/>
+          </a:prstGeom>
+          <a:noFill/>
+          <a:ln/>
+        </p:spPr>
+        <p:txBody>
+          <a:bodyPr wrap="square" rtlCol="0" anchor="t"/>
+          <a:lstStyle/>
+          <a:p>
+            <a:pPr algn="ctr" indent="0" marL="0">
+              <a:buNone/>
+            </a:pPr>
+            <a:r>
+              <a:rPr lang="en-US" sz="1300" i="1" dirty="0">
+                <a:solidFill>
+                  <a:srgbClr val="5A5A5A"/>
+                </a:solidFill>
+                <a:latin typeface="Red Hat Text" pitchFamily="34" charset="0"/>
+                <a:ea typeface="Red Hat Text" pitchFamily="34" charset="-122"/>
+                <a:cs typeface="Red Hat Text" pitchFamily="34" charset="-120"/>
+              </a:rPr>
+              <a:t>Chapters, the GraphQL schema and contracts, and both-stack runnable examples</a:t>
+            </a:r>
+            <a:endParaRPr lang="en-US" sz="1300" dirty="0"/>
+          </a:p>
+        </p:txBody>
+      </p:sp>
+      <p:sp>
+        <p:nvSpPr>
+          <p:cNvPr id="9" name="Text 5"/>
+          <p:cNvSpPr/>
+          <p:nvPr/>
+        </p:nvSpPr>
+        <p:spPr>
+          <a:xfrm>
+            <a:off x="1325880" y="5596128"/>
+            <a:ext cx="4389120" cy="292608"/>
+          </a:xfrm>
+          <a:prstGeom prst="rect">
+            <a:avLst/>
+          </a:prstGeom>
+          <a:noFill/>
+          <a:ln/>
+        </p:spPr>
+        <p:txBody>
+          <a:bodyPr wrap="square" rtlCol="0" anchor="ctr"/>
+          <a:lstStyle/>
+          <a:p>
+            <a:pPr algn="ctr" indent="0" marL="0">
+              <a:buNone/>
+            </a:pPr>
+            <a:r>
+              <a:rPr lang="en-US" sz="1000" dirty="0">
+                <a:solidFill>
+                  <a:srgbClr val="EE0000"/>
+                </a:solidFill>
+                <a:latin typeface="Red Hat Mono" pitchFamily="34" charset="0"/>
+                <a:ea typeface="Red Hat Mono" pitchFamily="34" charset="-122"/>
+                <a:cs typeface="Red Hat Mono" pitchFamily="34" charset="-120"/>
+              </a:rPr>
+              <a:t>patterncatalyst.github.io/api-patterns-and-practices-graphql</a:t>
+            </a:r>
+            <a:endParaRPr lang="en-US" sz="1000" dirty="0"/>
+          </a:p>
+        </p:txBody>
+      </p:sp>
+      <p:pic>
+        <p:nvPicPr>
+          <p:cNvPr id="10" name="Image 2" descr="/tmp/pcwork/api-patterns-and-practices-graphql/presentation/_shared/assets/qr-hub.png">    </p:cNvPr>
+          <p:cNvPicPr>
+            <a:picLocks noChangeAspect="1"/>
+          </p:cNvPicPr>
+          <p:nvPr/>
+        </p:nvPicPr>
+        <p:blipFill>
+          <a:blip r:embed="rId3"/>
+          <a:stretch>
+            <a:fillRect/>
+          </a:stretch>
+        </p:blipFill>
+        <p:spPr>
+          <a:xfrm>
+            <a:off x="7251192" y="1627632"/>
+            <a:ext cx="2834640" cy="2834640"/>
+          </a:xfrm>
+          <a:prstGeom prst="rect">
+            <a:avLst/>
+          </a:prstGeom>
+        </p:spPr>
+      </p:pic>
+      <p:sp>
+        <p:nvSpPr>
+          <p:cNvPr id="11" name="Text 6"/>
+          <p:cNvSpPr/>
+          <p:nvPr/>
+        </p:nvSpPr>
+        <p:spPr>
+          <a:xfrm>
+            <a:off x="6565392" y="4553712"/>
+            <a:ext cx="4206240" cy="365760"/>
+          </a:xfrm>
+          <a:prstGeom prst="rect">
+            <a:avLst/>
+          </a:prstGeom>
+          <a:noFill/>
+          <a:ln/>
+        </p:spPr>
+        <p:txBody>
+          <a:bodyPr wrap="square" rtlCol="0" anchor="ctr"/>
+          <a:lstStyle/>
+          <a:p>
+            <a:pPr algn="ctr" indent="0" marL="0">
+              <a:buNone/>
+            </a:pPr>
+            <a:r>
+              <a:rPr lang="en-US" sz="1800" b="1" dirty="0">
+                <a:solidFill>
+                  <a:srgbClr val="151515"/>
+                </a:solidFill>
+                <a:latin typeface="Red Hat Display" pitchFamily="34" charset="0"/>
+                <a:ea typeface="Red Hat Display" pitchFamily="34" charset="-122"/>
+                <a:cs typeface="Red Hat Display" pitchFamily="34" charset="-120"/>
+              </a:rPr>
+              <a:t>Workshops &amp; Tutorials</a:t>
+            </a:r>
+            <a:endParaRPr lang="en-US" sz="1800" dirty="0"/>
+          </a:p>
+        </p:txBody>
+      </p:sp>
+      <p:sp>
+        <p:nvSpPr>
+          <p:cNvPr id="12" name="Text 7"/>
+          <p:cNvSpPr/>
+          <p:nvPr/>
+        </p:nvSpPr>
+        <p:spPr>
+          <a:xfrm>
+            <a:off x="6473952" y="4937760"/>
+            <a:ext cx="4389120" cy="658368"/>
+          </a:xfrm>
+          <a:prstGeom prst="rect">
+            <a:avLst/>
+          </a:prstGeom>
+          <a:noFill/>
+          <a:ln/>
+        </p:spPr>
+        <p:txBody>
+          <a:bodyPr wrap="square" rtlCol="0" anchor="t"/>
+          <a:lstStyle/>
+          <a:p>
+            <a:pPr algn="ctr" indent="0" marL="0">
+              <a:buNone/>
+            </a:pPr>
+            <a:r>
+              <a:rPr lang="en-US" sz="1300" i="1" dirty="0">
+                <a:solidFill>
+                  <a:srgbClr val="5A5A5A"/>
+                </a:solidFill>
+                <a:latin typeface="Red Hat Text" pitchFamily="34" charset="0"/>
+                <a:ea typeface="Red Hat Text" pitchFamily="34" charset="-122"/>
+                <a:cs typeface="Red Hat Text" pitchFamily="34" charset="-120"/>
+              </a:rPr>
+              <a:t>The whole series: every workshop, tutorial, and deck in one place</a:t>
+            </a:r>
+            <a:endParaRPr lang="en-US" sz="1300" dirty="0"/>
+          </a:p>
+        </p:txBody>
+      </p:sp>
+      <p:sp>
+        <p:nvSpPr>
+          <p:cNvPr id="13" name="Text 8"/>
+          <p:cNvSpPr/>
+          <p:nvPr/>
+        </p:nvSpPr>
+        <p:spPr>
+          <a:xfrm>
+            <a:off x="6473952" y="5596128"/>
+            <a:ext cx="4389120" cy="292608"/>
+          </a:xfrm>
+          <a:prstGeom prst="rect">
+            <a:avLst/>
+          </a:prstGeom>
+          <a:noFill/>
+          <a:ln/>
+        </p:spPr>
+        <p:txBody>
+          <a:bodyPr wrap="square" rtlCol="0" anchor="ctr"/>
+          <a:lstStyle/>
+          <a:p>
+            <a:pPr algn="ctr" indent="0" marL="0">
+              <a:buNone/>
+            </a:pPr>
+            <a:r>
+              <a:rPr lang="en-US" sz="900" dirty="0">
+                <a:solidFill>
+                  <a:srgbClr val="EE0000"/>
+                </a:solidFill>
+                <a:latin typeface="Red Hat Mono" pitchFamily="34" charset="0"/>
+                <a:ea typeface="Red Hat Mono" pitchFamily="34" charset="-122"/>
+                <a:cs typeface="Red Hat Mono" pitchFamily="34" charset="-120"/>
+              </a:rPr>
+              <a:t>patterncatalyst.github.io/patterncatalyst-workshops-tutorials-list</a:t>
+            </a:r>
+            <a:endParaRPr lang="en-US" sz="900" dirty="0"/>
           </a:p>
         </p:txBody>
       </p:sp>
@@ -36417,7 +36954,7 @@
       </p:sp>
       <p:pic>
         <p:nvPicPr>
-          <p:cNvPr id="3" name="Image 0" descr="/work/_shared/assets/logo-candidate-2.png">    </p:cNvPr>
+          <p:cNvPr id="3" name="Image 0" descr="/tmp/pcwork/api-patterns-and-practices-graphql/presentation/_shared/assets/logo-candidate-2.png">    </p:cNvPr>
           <p:cNvPicPr>
             <a:picLocks noChangeAspect="1"/>
           </p:cNvPicPr>
@@ -37107,7 +37644,7 @@
       </p:sp>
       <p:pic>
         <p:nvPicPr>
-          <p:cNvPr id="3" name="Image 0" descr="/work/_shared/assets/logo-candidate-2.png">    </p:cNvPr>
+          <p:cNvPr id="3" name="Image 0" descr="/tmp/pcwork/api-patterns-and-practices-graphql/presentation/_shared/assets/logo-candidate-2.png">    </p:cNvPr>
           <p:cNvPicPr>
             <a:picLocks noChangeAspect="1"/>
           </p:cNvPicPr>
@@ -37893,7 +38430,7 @@
       </p:sp>
       <p:pic>
         <p:nvPicPr>
-          <p:cNvPr id="5" name="Image 0" descr="/work/_shared/assets/redhat-logo-white.png">    </p:cNvPr>
+          <p:cNvPr id="5" name="Image 0" descr="/tmp/pcwork/api-patterns-and-practices-graphql/presentation/_shared/assets/redhat-logo-white.png">    </p:cNvPr>
           <p:cNvPicPr>
             <a:picLocks noChangeAspect="1"/>
           </p:cNvPicPr>

--- a/presentation/api-patterns-graphql-python/api-patterns-graphql-python.pptx
+++ b/presentation/api-patterns-graphql-python/api-patterns-graphql-python.pptx
@@ -6969,7 +6969,7 @@
       </p:grpSpPr>
       <p:pic>
         <p:nvPicPr>
-          <p:cNvPr id="2" name="Image 0" descr="/tmp/pcwork/api-patterns-and-practices-graphql/presentation/_shared/assets/cover-panel.png">    </p:cNvPr>
+          <p:cNvPr id="2" name="Image 0" descr="/work/_shared/assets/cover-panel.png">    </p:cNvPr>
           <p:cNvPicPr>
             <a:picLocks noChangeAspect="1"/>
           </p:cNvPicPr>
@@ -7183,7 +7183,7 @@
       </p:sp>
       <p:pic>
         <p:nvPicPr>
-          <p:cNvPr id="7" name="Image 1" descr="/tmp/pcwork/api-patterns-and-practices-graphql/presentation/_shared/assets/logo-candidate-2.png">    </p:cNvPr>
+          <p:cNvPr id="7" name="Image 1" descr="/work/_shared/assets/logo-candidate-2.png">    </p:cNvPr>
           <p:cNvPicPr>
             <a:picLocks noChangeAspect="1"/>
           </p:cNvPicPr>
@@ -7271,7 +7271,7 @@
       </p:sp>
       <p:pic>
         <p:nvPicPr>
-          <p:cNvPr id="3" name="Image 0" descr="/tmp/pcwork/api-patterns-and-practices-graphql/presentation/_shared/assets/logo-candidate-2.png">    </p:cNvPr>
+          <p:cNvPr id="3" name="Image 0" descr="/work/_shared/assets/logo-candidate-2.png">    </p:cNvPr>
           <p:cNvPicPr>
             <a:picLocks noChangeAspect="1"/>
           </p:cNvPicPr>
@@ -7997,7 +7997,7 @@
       </p:sp>
       <p:pic>
         <p:nvPicPr>
-          <p:cNvPr id="3" name="Image 0" descr="/tmp/pcwork/api-patterns-and-practices-graphql/presentation/_shared/assets/logo-candidate-2.png">    </p:cNvPr>
+          <p:cNvPr id="3" name="Image 0" descr="/work/_shared/assets/logo-candidate-2.png">    </p:cNvPr>
           <p:cNvPicPr>
             <a:picLocks noChangeAspect="1"/>
           </p:cNvPicPr>
@@ -8099,7 +8099,7 @@
       </p:sp>
       <p:pic>
         <p:nvPicPr>
-          <p:cNvPr id="6" name="Image 1" descr="/tmp/pcwork/api-patterns-and-practices-graphql/presentation/_shared/png/05-two-direction-diff.png">    </p:cNvPr>
+          <p:cNvPr id="6" name="Image 1" descr="/work/_shared/png/05-two-direction-diff.png">    </p:cNvPr>
           <p:cNvPicPr>
             <a:picLocks noChangeAspect="1"/>
           </p:cNvPicPr>
@@ -8153,7 +8153,7 @@
                 <a:ea typeface="Red Hat Text" pitchFamily="34" charset="-122"/>
                 <a:cs typeface="Red Hat Text" pitchFamily="34" charset="-120"/>
               </a:rPr>
-              <a:t>Figure 5.2 — Each seeded drift is reported by one direction of the diff.</a:t>
+              <a:t>Figure 5.2: Each seeded drift is reported by one direction of the diff.</a:t>
             </a:r>
             <a:endParaRPr lang="en-US" sz="1300" dirty="0"/>
           </a:p>
@@ -8225,7 +8225,7 @@
       </p:sp>
       <p:pic>
         <p:nvPicPr>
-          <p:cNvPr id="3" name="Image 0" descr="/tmp/pcwork/api-patterns-and-practices-graphql/presentation/_shared/assets/logo-candidate-2.png">    </p:cNvPr>
+          <p:cNvPr id="3" name="Image 0" descr="/work/_shared/assets/logo-candidate-2.png">    </p:cNvPr>
           <p:cNvPicPr>
             <a:picLocks noChangeAspect="1"/>
           </p:cNvPicPr>
@@ -8903,7 +8903,7 @@
       </p:sp>
       <p:pic>
         <p:nvPicPr>
-          <p:cNvPr id="5" name="Image 0" descr="/tmp/pcwork/api-patterns-and-practices-graphql/presentation/_shared/assets/redhat-logo-white.png">    </p:cNvPr>
+          <p:cNvPr id="5" name="Image 0" descr="/work/_shared/assets/redhat-logo-white.png">    </p:cNvPr>
           <p:cNvPicPr>
             <a:picLocks noChangeAspect="1"/>
           </p:cNvPicPr>
@@ -8991,7 +8991,7 @@
       </p:sp>
       <p:pic>
         <p:nvPicPr>
-          <p:cNvPr id="3" name="Image 0" descr="/tmp/pcwork/api-patterns-and-practices-graphql/presentation/_shared/assets/logo-candidate-2.png">    </p:cNvPr>
+          <p:cNvPr id="3" name="Image 0" descr="/work/_shared/assets/logo-candidate-2.png">    </p:cNvPr>
           <p:cNvPicPr>
             <a:picLocks noChangeAspect="1"/>
           </p:cNvPicPr>
@@ -9093,7 +9093,7 @@
       </p:sp>
       <p:pic>
         <p:nvPicPr>
-          <p:cNvPr id="6" name="Image 1" descr="/tmp/pcwork/api-patterns-and-practices-graphql/presentation/_shared/png/06-parallel-siblings.png">    </p:cNvPr>
+          <p:cNvPr id="6" name="Image 1" descr="/work/_shared/png/06-parallel-siblings.png">    </p:cNvPr>
           <p:cNvPicPr>
             <a:picLocks noChangeAspect="1"/>
           </p:cNvPicPr>
@@ -9147,7 +9147,7 @@
                 <a:ea typeface="Red Hat Text" pitchFamily="34" charset="-122"/>
                 <a:cs typeface="Red Hat Text" pitchFamily="34" charset="-120"/>
               </a:rPr>
-              <a:t>Figure 6.3 — Sibling resolvers overlap in time when each one waits on its source without holding a thread.</a:t>
+              <a:t>Figure 6.3: Sibling resolvers overlap in time when each one waits on its source without holding a thread.</a:t>
             </a:r>
             <a:endParaRPr lang="en-US" sz="1300" dirty="0"/>
           </a:p>
@@ -9219,7 +9219,7 @@
       </p:sp>
       <p:pic>
         <p:nvPicPr>
-          <p:cNvPr id="3" name="Image 0" descr="/tmp/pcwork/api-patterns-and-practices-graphql/presentation/_shared/assets/logo-candidate-2.png">    </p:cNvPr>
+          <p:cNvPr id="3" name="Image 0" descr="/work/_shared/assets/logo-candidate-2.png">    </p:cNvPr>
           <p:cNvPicPr>
             <a:picLocks noChangeAspect="1"/>
           </p:cNvPicPr>
@@ -9999,7 +9999,7 @@
       </p:sp>
       <p:pic>
         <p:nvPicPr>
-          <p:cNvPr id="3" name="Image 0" descr="/tmp/pcwork/api-patterns-and-practices-graphql/presentation/_shared/assets/logo-candidate-2.png">    </p:cNvPr>
+          <p:cNvPr id="3" name="Image 0" descr="/work/_shared/assets/logo-candidate-2.png">    </p:cNvPr>
           <p:cNvPicPr>
             <a:picLocks noChangeAspect="1"/>
           </p:cNvPicPr>
@@ -10599,7 +10599,7 @@
       </p:sp>
       <p:pic>
         <p:nvPicPr>
-          <p:cNvPr id="3" name="Image 0" descr="/tmp/pcwork/api-patterns-and-practices-graphql/presentation/_shared/assets/logo-candidate-2.png">    </p:cNvPr>
+          <p:cNvPr id="3" name="Image 0" descr="/work/_shared/assets/logo-candidate-2.png">    </p:cNvPr>
           <p:cNvPicPr>
             <a:picLocks noChangeAspect="1"/>
           </p:cNvPicPr>
@@ -11439,7 +11439,7 @@
       </p:sp>
       <p:pic>
         <p:nvPicPr>
-          <p:cNvPr id="5" name="Image 0" descr="/tmp/pcwork/api-patterns-and-practices-graphql/presentation/_shared/assets/redhat-logo-white.png">    </p:cNvPr>
+          <p:cNvPr id="5" name="Image 0" descr="/work/_shared/assets/redhat-logo-white.png">    </p:cNvPr>
           <p:cNvPicPr>
             <a:picLocks noChangeAspect="1"/>
           </p:cNvPicPr>
@@ -11527,7 +11527,7 @@
       </p:sp>
       <p:pic>
         <p:nvPicPr>
-          <p:cNvPr id="3" name="Image 0" descr="/tmp/pcwork/api-patterns-and-practices-graphql/presentation/_shared/assets/logo-candidate-2.png">    </p:cNvPr>
+          <p:cNvPr id="3" name="Image 0" descr="/work/_shared/assets/logo-candidate-2.png">    </p:cNvPr>
           <p:cNvPicPr>
             <a:picLocks noChangeAspect="1"/>
           </p:cNvPicPr>
@@ -12217,7 +12217,7 @@
       </p:sp>
       <p:pic>
         <p:nvPicPr>
-          <p:cNvPr id="3" name="Image 0" descr="/tmp/pcwork/api-patterns-and-practices-graphql/presentation/_shared/assets/logo-candidate-2.png">    </p:cNvPr>
+          <p:cNvPr id="3" name="Image 0" descr="/work/_shared/assets/logo-candidate-2.png">    </p:cNvPr>
           <p:cNvPicPr>
             <a:picLocks noChangeAspect="1"/>
           </p:cNvPicPr>
@@ -12715,7 +12715,7 @@
       </p:sp>
       <p:pic>
         <p:nvPicPr>
-          <p:cNvPr id="3" name="Image 0" descr="/tmp/pcwork/api-patterns-and-practices-graphql/presentation/_shared/assets/logo-candidate-2.png">    </p:cNvPr>
+          <p:cNvPr id="3" name="Image 0" descr="/work/_shared/assets/logo-candidate-2.png">    </p:cNvPr>
           <p:cNvPicPr>
             <a:picLocks noChangeAspect="1"/>
           </p:cNvPicPr>
@@ -13441,7 +13441,7 @@
       </p:sp>
       <p:pic>
         <p:nvPicPr>
-          <p:cNvPr id="3" name="Image 0" descr="/tmp/pcwork/api-patterns-and-practices-graphql/presentation/_shared/assets/logo-candidate-2.png">    </p:cNvPr>
+          <p:cNvPr id="3" name="Image 0" descr="/work/_shared/assets/logo-candidate-2.png">    </p:cNvPr>
           <p:cNvPicPr>
             <a:picLocks noChangeAspect="1"/>
           </p:cNvPicPr>
@@ -14095,7 +14095,7 @@
       </p:sp>
       <p:pic>
         <p:nvPicPr>
-          <p:cNvPr id="3" name="Image 0" descr="/tmp/pcwork/api-patterns-and-practices-graphql/presentation/_shared/assets/logo-candidate-2.png">    </p:cNvPr>
+          <p:cNvPr id="3" name="Image 0" descr="/work/_shared/assets/logo-candidate-2.png">    </p:cNvPr>
           <p:cNvPicPr>
             <a:picLocks noChangeAspect="1"/>
           </p:cNvPicPr>
@@ -14197,7 +14197,7 @@
       </p:sp>
       <p:pic>
         <p:nvPicPr>
-          <p:cNvPr id="6" name="Image 1" descr="/tmp/pcwork/api-patterns-and-practices-graphql/presentation/_shared/png/09-error-masking.png">    </p:cNvPr>
+          <p:cNvPr id="6" name="Image 1" descr="/work/_shared/png/09-error-masking.png">    </p:cNvPr>
           <p:cNvPicPr>
             <a:picLocks noChangeAspect="1"/>
           </p:cNvPicPr>
@@ -14251,7 +14251,7 @@
                 <a:ea typeface="Red Hat Text" pitchFamily="34" charset="-122"/>
                 <a:cs typeface="Red Hat Text" pitchFamily="34" charset="-120"/>
               </a:rPr>
-              <a:t>Figure 9.3 — Masking is an allowlist: the client sees what the service listed, and the log sees everything.</a:t>
+              <a:t>Figure 9.3: Masking is an allowlist: the client sees what the service listed, and the log sees everything.</a:t>
             </a:r>
             <a:endParaRPr lang="en-US" sz="1300" dirty="0"/>
           </a:p>
@@ -14401,7 +14401,7 @@
       </p:sp>
       <p:pic>
         <p:nvPicPr>
-          <p:cNvPr id="5" name="Image 0" descr="/tmp/pcwork/api-patterns-and-practices-graphql/presentation/_shared/assets/redhat-logo-white.png">    </p:cNvPr>
+          <p:cNvPr id="5" name="Image 0" descr="/work/_shared/assets/redhat-logo-white.png">    </p:cNvPr>
           <p:cNvPicPr>
             <a:picLocks noChangeAspect="1"/>
           </p:cNvPicPr>
@@ -14489,7 +14489,7 @@
       </p:sp>
       <p:pic>
         <p:nvPicPr>
-          <p:cNvPr id="3" name="Image 0" descr="/tmp/pcwork/api-patterns-and-practices-graphql/presentation/_shared/assets/logo-candidate-2.png">    </p:cNvPr>
+          <p:cNvPr id="3" name="Image 0" descr="/work/_shared/assets/logo-candidate-2.png">    </p:cNvPr>
           <p:cNvPicPr>
             <a:picLocks noChangeAspect="1"/>
           </p:cNvPicPr>
@@ -15107,7 +15107,7 @@
       </p:sp>
       <p:pic>
         <p:nvPicPr>
-          <p:cNvPr id="3" name="Image 0" descr="/tmp/pcwork/api-patterns-and-practices-graphql/presentation/_shared/assets/logo-candidate-2.png">    </p:cNvPr>
+          <p:cNvPr id="3" name="Image 0" descr="/work/_shared/assets/logo-candidate-2.png">    </p:cNvPr>
           <p:cNvPicPr>
             <a:picLocks noChangeAspect="1"/>
           </p:cNvPicPr>
@@ -15635,7 +15635,7 @@
       </p:sp>
       <p:pic>
         <p:nvPicPr>
-          <p:cNvPr id="3" name="Image 0" descr="/tmp/pcwork/api-patterns-and-practices-graphql/presentation/_shared/assets/logo-candidate-2.png">    </p:cNvPr>
+          <p:cNvPr id="3" name="Image 0" descr="/work/_shared/assets/logo-candidate-2.png">    </p:cNvPr>
           <p:cNvPicPr>
             <a:picLocks noChangeAspect="1"/>
           </p:cNvPicPr>
@@ -15737,7 +15737,7 @@
       </p:sp>
       <p:pic>
         <p:nvPicPr>
-          <p:cNvPr id="6" name="Image 1" descr="/tmp/pcwork/api-patterns-and-practices-graphql/presentation/_shared/png/11-deprecation-lifecycle.png">    </p:cNvPr>
+          <p:cNvPr id="6" name="Image 1" descr="/work/_shared/png/11-deprecation-lifecycle.png">    </p:cNvPr>
           <p:cNvPicPr>
             <a:picLocks noChangeAspect="1"/>
           </p:cNvPicPr>
@@ -15791,7 +15791,7 @@
                 <a:ea typeface="Red Hat Text" pitchFamily="34" charset="-122"/>
                 <a:cs typeface="Red Hat Text" pitchFamily="34" charset="-120"/>
               </a:rPr>
-              <a:t>Figure 11.2 — Add the replacement, deprecate, observe usage, then remove with a recorded sign-off.</a:t>
+              <a:t>Figure 11.2: Add the replacement, deprecate, observe usage, then remove with a recorded sign-off.</a:t>
             </a:r>
             <a:endParaRPr lang="en-US" sz="1300" dirty="0"/>
           </a:p>
@@ -15941,7 +15941,7 @@
       </p:sp>
       <p:pic>
         <p:nvPicPr>
-          <p:cNvPr id="5" name="Image 0" descr="/tmp/pcwork/api-patterns-and-practices-graphql/presentation/_shared/assets/redhat-logo-white.png">    </p:cNvPr>
+          <p:cNvPr id="5" name="Image 0" descr="/work/_shared/assets/redhat-logo-white.png">    </p:cNvPr>
           <p:cNvPicPr>
             <a:picLocks noChangeAspect="1"/>
           </p:cNvPicPr>
@@ -16029,7 +16029,7 @@
       </p:sp>
       <p:pic>
         <p:nvPicPr>
-          <p:cNvPr id="3" name="Image 0" descr="/tmp/pcwork/api-patterns-and-practices-graphql/presentation/_shared/assets/logo-candidate-2.png">    </p:cNvPr>
+          <p:cNvPr id="3" name="Image 0" descr="/work/_shared/assets/logo-candidate-2.png">    </p:cNvPr>
           <p:cNvPicPr>
             <a:picLocks noChangeAspect="1"/>
           </p:cNvPicPr>
@@ -16791,7 +16791,7 @@
       </p:sp>
       <p:pic>
         <p:nvPicPr>
-          <p:cNvPr id="3" name="Image 0" descr="/tmp/pcwork/api-patterns-and-practices-graphql/presentation/_shared/assets/logo-candidate-2.png">    </p:cNvPr>
+          <p:cNvPr id="3" name="Image 0" descr="/work/_shared/assets/logo-candidate-2.png">    </p:cNvPr>
           <p:cNvPicPr>
             <a:picLocks noChangeAspect="1"/>
           </p:cNvPicPr>
@@ -17499,7 +17499,7 @@
       </p:sp>
       <p:pic>
         <p:nvPicPr>
-          <p:cNvPr id="3" name="Image 0" descr="/tmp/pcwork/api-patterns-and-practices-graphql/presentation/_shared/assets/logo-candidate-2.png">    </p:cNvPr>
+          <p:cNvPr id="3" name="Image 0" descr="/work/_shared/assets/logo-candidate-2.png">    </p:cNvPr>
           <p:cNvPicPr>
             <a:picLocks noChangeAspect="1"/>
           </p:cNvPicPr>
@@ -17846,7 +17846,7 @@
       </p:sp>
       <p:pic>
         <p:nvPicPr>
-          <p:cNvPr id="3" name="Image 0" descr="/tmp/pcwork/api-patterns-and-practices-graphql/presentation/_shared/assets/logo-candidate-2.png">    </p:cNvPr>
+          <p:cNvPr id="3" name="Image 0" descr="/work/_shared/assets/logo-candidate-2.png">    </p:cNvPr>
           <p:cNvPicPr>
             <a:picLocks noChangeAspect="1"/>
           </p:cNvPicPr>
@@ -18500,7 +18500,7 @@
       </p:sp>
       <p:pic>
         <p:nvPicPr>
-          <p:cNvPr id="3" name="Image 0" descr="/tmp/pcwork/api-patterns-and-practices-graphql/presentation/_shared/assets/logo-candidate-2.png">    </p:cNvPr>
+          <p:cNvPr id="3" name="Image 0" descr="/work/_shared/assets/logo-candidate-2.png">    </p:cNvPr>
           <p:cNvPicPr>
             <a:picLocks noChangeAspect="1"/>
           </p:cNvPicPr>
@@ -18602,7 +18602,7 @@
       </p:sp>
       <p:pic>
         <p:nvPicPr>
-          <p:cNvPr id="6" name="Image 1" descr="/tmp/pcwork/api-patterns-and-practices-graphql/presentation/_shared/png/13-dataloader-tick.png">    </p:cNvPr>
+          <p:cNvPr id="6" name="Image 1" descr="/work/_shared/png/13-dataloader-tick.png">    </p:cNvPr>
           <p:cNvPicPr>
             <a:picLocks noChangeAspect="1"/>
           </p:cNvPicPr>
@@ -18656,7 +18656,7 @@
                 <a:ea typeface="Red Hat Text" pitchFamily="34" charset="-122"/>
                 <a:cs typeface="Red Hat Text" pitchFamily="34" charset="-120"/>
               </a:rPr>
-              <a:t>Figure 13.3 — Loads queue during a tick, one bulk call follows, and the next level starts when it returns.</a:t>
+              <a:t>Figure 13.3: Loads queue during a tick, one bulk call follows, and the next level starts when it returns.</a:t>
             </a:r>
             <a:endParaRPr lang="en-US" sz="1300" dirty="0"/>
           </a:p>
@@ -18806,7 +18806,7 @@
       </p:sp>
       <p:pic>
         <p:nvPicPr>
-          <p:cNvPr id="5" name="Image 0" descr="/tmp/pcwork/api-patterns-and-practices-graphql/presentation/_shared/assets/redhat-logo-white.png">    </p:cNvPr>
+          <p:cNvPr id="5" name="Image 0" descr="/work/_shared/assets/redhat-logo-white.png">    </p:cNvPr>
           <p:cNvPicPr>
             <a:picLocks noChangeAspect="1"/>
           </p:cNvPicPr>
@@ -18894,7 +18894,7 @@
       </p:sp>
       <p:pic>
         <p:nvPicPr>
-          <p:cNvPr id="3" name="Image 0" descr="/tmp/pcwork/api-patterns-and-practices-graphql/presentation/_shared/assets/logo-candidate-2.png">    </p:cNvPr>
+          <p:cNvPr id="3" name="Image 0" descr="/work/_shared/assets/logo-candidate-2.png">    </p:cNvPr>
           <p:cNvPicPr>
             <a:picLocks noChangeAspect="1"/>
           </p:cNvPicPr>
@@ -18996,7 +18996,7 @@
       </p:sp>
       <p:pic>
         <p:nvPicPr>
-          <p:cNvPr id="6" name="Image 1" descr="/tmp/pcwork/api-patterns-and-practices-graphql/presentation/_shared/png/14-limit-pipeline.png">    </p:cNvPr>
+          <p:cNvPr id="6" name="Image 1" descr="/work/_shared/png/14-limit-pipeline.png">    </p:cNvPr>
           <p:cNvPicPr>
             <a:picLocks noChangeAspect="1"/>
           </p:cNvPicPr>
@@ -19050,7 +19050,7 @@
                 <a:ea typeface="Red Hat Text" pitchFamily="34" charset="-122"/>
                 <a:cs typeface="Red Hat Text" pitchFamily="34" charset="-120"/>
               </a:rPr>
-              <a:t>Figure 14.2 — Each limit fires at the earliest stage that has the information it needs.</a:t>
+              <a:t>Figure 14.2: Each limit fires at the earliest stage that has the information it needs.</a:t>
             </a:r>
             <a:endParaRPr lang="en-US" sz="1300" dirty="0"/>
           </a:p>
@@ -19122,7 +19122,7 @@
       </p:sp>
       <p:pic>
         <p:nvPicPr>
-          <p:cNvPr id="3" name="Image 0" descr="/tmp/pcwork/api-patterns-and-practices-graphql/presentation/_shared/assets/logo-candidate-2.png">    </p:cNvPr>
+          <p:cNvPr id="3" name="Image 0" descr="/work/_shared/assets/logo-candidate-2.png">    </p:cNvPr>
           <p:cNvPicPr>
             <a:picLocks noChangeAspect="1"/>
           </p:cNvPicPr>
@@ -19578,7 +19578,7 @@
       </p:sp>
       <p:pic>
         <p:nvPicPr>
-          <p:cNvPr id="3" name="Image 0" descr="/tmp/pcwork/api-patterns-and-practices-graphql/presentation/_shared/assets/logo-candidate-2.png">    </p:cNvPr>
+          <p:cNvPr id="3" name="Image 0" descr="/work/_shared/assets/logo-candidate-2.png">    </p:cNvPr>
           <p:cNvPicPr>
             <a:picLocks noChangeAspect="1"/>
           </p:cNvPicPr>
@@ -20322,7 +20322,7 @@
       </p:sp>
       <p:pic>
         <p:nvPicPr>
-          <p:cNvPr id="3" name="Image 0" descr="/tmp/pcwork/api-patterns-and-practices-graphql/presentation/_shared/assets/logo-candidate-2.png">    </p:cNvPr>
+          <p:cNvPr id="3" name="Image 0" descr="/work/_shared/assets/logo-candidate-2.png">    </p:cNvPr>
           <p:cNvPicPr>
             <a:picLocks noChangeAspect="1"/>
           </p:cNvPicPr>
@@ -20424,7 +20424,7 @@
       </p:sp>
       <p:pic>
         <p:nvPicPr>
-          <p:cNvPr id="6" name="Image 1" descr="/tmp/pcwork/api-patterns-and-practices-graphql/presentation/_shared/png/15-persisted-document-seam.png">    </p:cNvPr>
+          <p:cNvPr id="6" name="Image 1" descr="/work/_shared/png/15-persisted-document-seam.png">    </p:cNvPr>
           <p:cNvPicPr>
             <a:picLocks noChangeAspect="1"/>
           </p:cNvPicPr>
@@ -20478,7 +20478,7 @@
                 <a:ea typeface="Red Hat Text" pitchFamily="34" charset="-122"/>
                 <a:cs typeface="Red Hat Text" pitchFamily="34" charset="-120"/>
               </a:rPr>
-              <a:t>Figure 15.3 — The seam where a hash becomes document text, drawn for both stacks.</a:t>
+              <a:t>Figure 15.3: The seam where a hash becomes document text, drawn for both stacks.</a:t>
             </a:r>
             <a:endParaRPr lang="en-US" sz="1300" dirty="0"/>
           </a:p>
@@ -20550,7 +20550,7 @@
       </p:sp>
       <p:pic>
         <p:nvPicPr>
-          <p:cNvPr id="3" name="Image 0" descr="/tmp/pcwork/api-patterns-and-practices-graphql/presentation/_shared/assets/logo-candidate-2.png">    </p:cNvPr>
+          <p:cNvPr id="3" name="Image 0" descr="/work/_shared/assets/logo-candidate-2.png">    </p:cNvPr>
           <p:cNvPicPr>
             <a:picLocks noChangeAspect="1"/>
           </p:cNvPicPr>
@@ -21312,7 +21312,7 @@
       </p:sp>
       <p:pic>
         <p:nvPicPr>
-          <p:cNvPr id="3" name="Image 0" descr="/tmp/pcwork/api-patterns-and-practices-graphql/presentation/_shared/assets/logo-candidate-2.png">    </p:cNvPr>
+          <p:cNvPr id="3" name="Image 0" descr="/work/_shared/assets/logo-candidate-2.png">    </p:cNvPr>
           <p:cNvPicPr>
             <a:picLocks noChangeAspect="1"/>
           </p:cNvPicPr>
@@ -22152,7 +22152,7 @@
       </p:sp>
       <p:pic>
         <p:nvPicPr>
-          <p:cNvPr id="5" name="Image 0" descr="/tmp/pcwork/api-patterns-and-practices-graphql/presentation/_shared/assets/redhat-logo-white.png">    </p:cNvPr>
+          <p:cNvPr id="5" name="Image 0" descr="/work/_shared/assets/redhat-logo-white.png">    </p:cNvPr>
           <p:cNvPicPr>
             <a:picLocks noChangeAspect="1"/>
           </p:cNvPicPr>
@@ -22318,7 +22318,7 @@
       </p:sp>
       <p:pic>
         <p:nvPicPr>
-          <p:cNvPr id="5" name="Image 0" descr="/tmp/pcwork/api-patterns-and-practices-graphql/presentation/_shared/assets/redhat-logo-white.png">    </p:cNvPr>
+          <p:cNvPr id="5" name="Image 0" descr="/work/_shared/assets/redhat-logo-white.png">    </p:cNvPr>
           <p:cNvPicPr>
             <a:picLocks noChangeAspect="1"/>
           </p:cNvPicPr>
@@ -22406,7 +22406,7 @@
       </p:sp>
       <p:pic>
         <p:nvPicPr>
-          <p:cNvPr id="3" name="Image 0" descr="/tmp/pcwork/api-patterns-and-practices-graphql/presentation/_shared/assets/logo-candidate-2.png">    </p:cNvPr>
+          <p:cNvPr id="3" name="Image 0" descr="/work/_shared/assets/logo-candidate-2.png">    </p:cNvPr>
           <p:cNvPicPr>
             <a:picLocks noChangeAspect="1"/>
           </p:cNvPicPr>
@@ -22844,7 +22844,7 @@
       </p:sp>
       <p:pic>
         <p:nvPicPr>
-          <p:cNvPr id="3" name="Image 0" descr="/tmp/pcwork/api-patterns-and-practices-graphql/presentation/_shared/assets/logo-candidate-2.png">    </p:cNvPr>
+          <p:cNvPr id="3" name="Image 0" descr="/work/_shared/assets/logo-candidate-2.png">    </p:cNvPr>
           <p:cNvPicPr>
             <a:picLocks noChangeAspect="1"/>
           </p:cNvPicPr>
@@ -23390,7 +23390,7 @@
       </p:sp>
       <p:pic>
         <p:nvPicPr>
-          <p:cNvPr id="3" name="Image 0" descr="/tmp/pcwork/api-patterns-and-practices-graphql/presentation/_shared/assets/logo-candidate-2.png">    </p:cNvPr>
+          <p:cNvPr id="3" name="Image 0" descr="/work/_shared/assets/logo-candidate-2.png">    </p:cNvPr>
           <p:cNvPicPr>
             <a:picLocks noChangeAspect="1"/>
           </p:cNvPicPr>
@@ -24134,7 +24134,7 @@
       </p:sp>
       <p:pic>
         <p:nvPicPr>
-          <p:cNvPr id="3" name="Image 0" descr="/tmp/pcwork/api-patterns-and-practices-graphql/presentation/_shared/assets/logo-candidate-2.png">    </p:cNvPr>
+          <p:cNvPr id="3" name="Image 0" descr="/work/_shared/assets/logo-candidate-2.png">    </p:cNvPr>
           <p:cNvPicPr>
             <a:picLocks noChangeAspect="1"/>
           </p:cNvPicPr>
@@ -24794,7 +24794,7 @@
       </p:sp>
       <p:pic>
         <p:nvPicPr>
-          <p:cNvPr id="5" name="Image 0" descr="/tmp/pcwork/api-patterns-and-practices-graphql/presentation/_shared/assets/redhat-logo-white.png">    </p:cNvPr>
+          <p:cNvPr id="5" name="Image 0" descr="/work/_shared/assets/redhat-logo-white.png">    </p:cNvPr>
           <p:cNvPicPr>
             <a:picLocks noChangeAspect="1"/>
           </p:cNvPicPr>
@@ -24882,7 +24882,7 @@
       </p:sp>
       <p:pic>
         <p:nvPicPr>
-          <p:cNvPr id="3" name="Image 0" descr="/tmp/pcwork/api-patterns-and-practices-graphql/presentation/_shared/assets/logo-candidate-2.png">    </p:cNvPr>
+          <p:cNvPr id="3" name="Image 0" descr="/work/_shared/assets/logo-candidate-2.png">    </p:cNvPr>
           <p:cNvPicPr>
             <a:picLocks noChangeAspect="1"/>
           </p:cNvPicPr>
@@ -24984,7 +24984,7 @@
       </p:sp>
       <p:pic>
         <p:nvPicPr>
-          <p:cNvPr id="6" name="Image 1" descr="/tmp/pcwork/api-patterns-and-practices-graphql/presentation/_shared/png/19-telemetry-pipeline.png">    </p:cNvPr>
+          <p:cNvPr id="6" name="Image 1" descr="/work/_shared/png/19-telemetry-pipeline.png">    </p:cNvPr>
           <p:cNvPicPr>
             <a:picLocks noChangeAspect="1"/>
           </p:cNvPicPr>
@@ -25038,7 +25038,7 @@
                 <a:ea typeface="Red Hat Text" pitchFamily="34" charset="-122"/>
                 <a:cs typeface="Red Hat Text" pitchFamily="34" charset="-120"/>
               </a:rPr>
-              <a:t>Figure 19.2 — Three signals leave over one protocol, and the trace id joins spans, metrics and logs.</a:t>
+              <a:t>Figure 19.2: Three signals leave over one protocol, and the trace id joins spans, metrics and logs.</a:t>
             </a:r>
             <a:endParaRPr lang="en-US" sz="1300" dirty="0"/>
           </a:p>
@@ -25110,7 +25110,7 @@
       </p:sp>
       <p:pic>
         <p:nvPicPr>
-          <p:cNvPr id="3" name="Image 0" descr="/tmp/pcwork/api-patterns-and-practices-graphql/presentation/_shared/assets/logo-candidate-2.png">    </p:cNvPr>
+          <p:cNvPr id="3" name="Image 0" descr="/work/_shared/assets/logo-candidate-2.png">    </p:cNvPr>
           <p:cNvPicPr>
             <a:picLocks noChangeAspect="1"/>
           </p:cNvPicPr>
@@ -25800,7 +25800,7 @@
       </p:sp>
       <p:pic>
         <p:nvPicPr>
-          <p:cNvPr id="3" name="Image 0" descr="/tmp/pcwork/api-patterns-and-practices-graphql/presentation/_shared/assets/logo-candidate-2.png">    </p:cNvPr>
+          <p:cNvPr id="3" name="Image 0" descr="/work/_shared/assets/logo-candidate-2.png">    </p:cNvPr>
           <p:cNvPicPr>
             <a:picLocks noChangeAspect="1"/>
           </p:cNvPicPr>
@@ -26508,7 +26508,7 @@
       </p:sp>
       <p:pic>
         <p:nvPicPr>
-          <p:cNvPr id="3" name="Image 0" descr="/tmp/pcwork/api-patterns-and-practices-graphql/presentation/_shared/assets/logo-candidate-2.png">    </p:cNvPr>
+          <p:cNvPr id="3" name="Image 0" descr="/work/_shared/assets/logo-candidate-2.png">    </p:cNvPr>
           <p:cNvPicPr>
             <a:picLocks noChangeAspect="1"/>
           </p:cNvPicPr>
@@ -26610,7 +26610,7 @@
       </p:sp>
       <p:pic>
         <p:nvPicPr>
-          <p:cNvPr id="6" name="Image 1" descr="/tmp/pcwork/api-patterns-and-practices-graphql/presentation/_shared/png/20-cross-stack-topology.png">    </p:cNvPr>
+          <p:cNvPr id="6" name="Image 1" descr="/work/_shared/png/20-cross-stack-topology.png">    </p:cNvPr>
           <p:cNvPicPr>
             <a:picLocks noChangeAspect="1"/>
           </p:cNvPicPr>
@@ -26664,7 +26664,7 @@
                 <a:ea typeface="Red Hat Text" pitchFamily="34" charset="-122"/>
                 <a:cs typeface="Red Hat Text" pitchFamily="34" charset="-120"/>
               </a:rPr>
-              <a:t>Figure 20.5 — The supergraph does not know which stack is behind a subgraph.</a:t>
+              <a:t>Figure 20.5: The supergraph does not know which stack is behind a subgraph.</a:t>
             </a:r>
             <a:endParaRPr lang="en-US" sz="1300" dirty="0"/>
           </a:p>
@@ -26814,7 +26814,7 @@
       </p:sp>
       <p:pic>
         <p:nvPicPr>
-          <p:cNvPr id="5" name="Image 0" descr="/tmp/pcwork/api-patterns-and-practices-graphql/presentation/_shared/assets/redhat-logo-white.png">    </p:cNvPr>
+          <p:cNvPr id="5" name="Image 0" descr="/work/_shared/assets/redhat-logo-white.png">    </p:cNvPr>
           <p:cNvPicPr>
             <a:picLocks noChangeAspect="1"/>
           </p:cNvPicPr>
@@ -26902,7 +26902,7 @@
       </p:sp>
       <p:pic>
         <p:nvPicPr>
-          <p:cNvPr id="3" name="Image 0" descr="/tmp/pcwork/api-patterns-and-practices-graphql/presentation/_shared/assets/logo-candidate-2.png">    </p:cNvPr>
+          <p:cNvPr id="3" name="Image 0" descr="/work/_shared/assets/logo-candidate-2.png">    </p:cNvPr>
           <p:cNvPicPr>
             <a:picLocks noChangeAspect="1"/>
           </p:cNvPicPr>
@@ -27004,7 +27004,7 @@
       </p:sp>
       <p:pic>
         <p:nvPicPr>
-          <p:cNvPr id="6" name="Image 1" descr="/tmp/pcwork/api-patterns-and-practices-graphql/presentation/_shared/png/00-lab-topology.png">    </p:cNvPr>
+          <p:cNvPr id="6" name="Image 1" descr="/work/_shared/png/00-lab-topology.png">    </p:cNvPr>
           <p:cNvPicPr>
             <a:picLocks noChangeAspect="1"/>
           </p:cNvPicPr>
@@ -27058,7 +27058,7 @@
                 <a:ea typeface="Red Hat Text" pitchFamily="34" charset="-122"/>
                 <a:cs typeface="Red Hat Text" pitchFamily="34" charset="-120"/>
               </a:rPr>
-              <a:t>Figure 0.1 — The lab: verify.sh drives both stacks and diffs each live schema with the canonical SDL.</a:t>
+              <a:t>Figure 0.1: The lab: verify.sh drives both stacks and diffs each live schema with the canonical SDL.</a:t>
             </a:r>
             <a:endParaRPr lang="en-US" sz="1300" dirty="0"/>
           </a:p>
@@ -27130,7 +27130,7 @@
       </p:sp>
       <p:pic>
         <p:nvPicPr>
-          <p:cNvPr id="3" name="Image 0" descr="/tmp/pcwork/api-patterns-and-practices-graphql/presentation/_shared/assets/logo-candidate-2.png">    </p:cNvPr>
+          <p:cNvPr id="3" name="Image 0" descr="/work/_shared/assets/logo-candidate-2.png">    </p:cNvPr>
           <p:cNvPicPr>
             <a:picLocks noChangeAspect="1"/>
           </p:cNvPicPr>
@@ -27856,7 +27856,7 @@
       </p:sp>
       <p:pic>
         <p:nvPicPr>
-          <p:cNvPr id="3" name="Image 0" descr="/tmp/pcwork/api-patterns-and-practices-graphql/presentation/_shared/assets/logo-candidate-2.png">    </p:cNvPr>
+          <p:cNvPr id="3" name="Image 0" descr="/work/_shared/assets/logo-candidate-2.png">    </p:cNvPr>
           <p:cNvPicPr>
             <a:picLocks noChangeAspect="1"/>
           </p:cNvPicPr>
@@ -28348,7 +28348,7 @@
       </p:sp>
       <p:pic>
         <p:nvPicPr>
-          <p:cNvPr id="3" name="Image 0" descr="/tmp/pcwork/api-patterns-and-practices-graphql/presentation/_shared/assets/logo-candidate-2.png">    </p:cNvPr>
+          <p:cNvPr id="3" name="Image 0" descr="/work/_shared/assets/logo-candidate-2.png">    </p:cNvPr>
           <p:cNvPicPr>
             <a:picLocks noChangeAspect="1"/>
           </p:cNvPicPr>
@@ -29152,7 +29152,7 @@
       </p:sp>
       <p:pic>
         <p:nvPicPr>
-          <p:cNvPr id="5" name="Image 0" descr="/tmp/pcwork/api-patterns-and-practices-graphql/presentation/_shared/assets/redhat-logo-white.png">    </p:cNvPr>
+          <p:cNvPr id="5" name="Image 0" descr="/work/_shared/assets/redhat-logo-white.png">    </p:cNvPr>
           <p:cNvPicPr>
             <a:picLocks noChangeAspect="1"/>
           </p:cNvPicPr>
@@ -29240,7 +29240,7 @@
       </p:sp>
       <p:pic>
         <p:nvPicPr>
-          <p:cNvPr id="3" name="Image 0" descr="/tmp/pcwork/api-patterns-and-practices-graphql/presentation/_shared/assets/logo-candidate-2.png">    </p:cNvPr>
+          <p:cNvPr id="3" name="Image 0" descr="/work/_shared/assets/logo-candidate-2.png">    </p:cNvPr>
           <p:cNvPicPr>
             <a:picLocks noChangeAspect="1"/>
           </p:cNvPicPr>
@@ -29342,7 +29342,7 @@
       </p:sp>
       <p:pic>
         <p:nvPicPr>
-          <p:cNvPr id="6" name="Image 1" descr="/tmp/pcwork/api-patterns-and-practices-graphql/presentation/_shared/png/23-test-layers.png">    </p:cNvPr>
+          <p:cNvPr id="6" name="Image 1" descr="/work/_shared/png/23-test-layers.png">    </p:cNvPr>
           <p:cNvPicPr>
             <a:picLocks noChangeAspect="1"/>
           </p:cNvPicPr>
@@ -29396,7 +29396,7 @@
                 <a:ea typeface="Red Hat Text" pitchFamily="34" charset="-122"/>
                 <a:cs typeface="Red Hat Text" pitchFamily="34" charset="-120"/>
               </a:rPr>
-              <a:t>Figure 23.1 — Six layers: three run in the stack's test image, and three run from verify.sh.</a:t>
+              <a:t>Figure 23.1: Six layers: three run in the stack's test image, and three run from verify.sh.</a:t>
             </a:r>
             <a:endParaRPr lang="en-US" sz="1300" dirty="0"/>
           </a:p>
@@ -29468,7 +29468,7 @@
       </p:sp>
       <p:pic>
         <p:nvPicPr>
-          <p:cNvPr id="3" name="Image 0" descr="/tmp/pcwork/api-patterns-and-practices-graphql/presentation/_shared/assets/logo-candidate-2.png">    </p:cNvPr>
+          <p:cNvPr id="3" name="Image 0" descr="/work/_shared/assets/logo-candidate-2.png">    </p:cNvPr>
           <p:cNvPicPr>
             <a:picLocks noChangeAspect="1"/>
           </p:cNvPicPr>
@@ -29942,7 +29942,7 @@
       </p:sp>
       <p:pic>
         <p:nvPicPr>
-          <p:cNvPr id="3" name="Image 0" descr="/tmp/pcwork/api-patterns-and-practices-graphql/presentation/_shared/assets/logo-candidate-2.png">    </p:cNvPr>
+          <p:cNvPr id="3" name="Image 0" descr="/work/_shared/assets/logo-candidate-2.png">    </p:cNvPr>
           <p:cNvPicPr>
             <a:picLocks noChangeAspect="1"/>
           </p:cNvPicPr>
@@ -30524,7 +30524,7 @@
       </p:sp>
       <p:pic>
         <p:nvPicPr>
-          <p:cNvPr id="3" name="Image 0" descr="/tmp/pcwork/api-patterns-and-practices-graphql/presentation/_shared/assets/logo-candidate-2.png">    </p:cNvPr>
+          <p:cNvPr id="3" name="Image 0" descr="/work/_shared/assets/logo-candidate-2.png">    </p:cNvPr>
           <p:cNvPicPr>
             <a:picLocks noChangeAspect="1"/>
           </p:cNvPicPr>
@@ -30626,7 +30626,7 @@
       </p:sp>
       <p:pic>
         <p:nvPicPr>
-          <p:cNvPr id="6" name="Image 1" descr="/tmp/pcwork/api-patterns-and-practices-graphql/presentation/_shared/png/24-dev-vs-prod-surfaces.png">    </p:cNvPr>
+          <p:cNvPr id="6" name="Image 1" descr="/work/_shared/png/24-dev-vs-prod-surfaces.png">    </p:cNvPr>
           <p:cNvPicPr>
             <a:picLocks noChangeAspect="1"/>
           </p:cNvPicPr>
@@ -30680,7 +30680,7 @@
                 <a:ea typeface="Red Hat Text" pitchFamily="34" charset="-122"/>
                 <a:cs typeface="Red Hat Text" pitchFamily="34" charset="-120"/>
               </a:rPr>
-              <a:t>Figure 24.2 — Development surfaces live on development instances; masking and trace ids are identical.</a:t>
+              <a:t>Figure 24.2: Development surfaces live on development instances; masking and trace ids are identical.</a:t>
             </a:r>
             <a:endParaRPr lang="en-US" sz="1300" dirty="0"/>
           </a:p>
@@ -30830,7 +30830,7 @@
       </p:sp>
       <p:pic>
         <p:nvPicPr>
-          <p:cNvPr id="5" name="Image 0" descr="/tmp/pcwork/api-patterns-and-practices-graphql/presentation/_shared/assets/redhat-logo-white.png">    </p:cNvPr>
+          <p:cNvPr id="5" name="Image 0" descr="/work/_shared/assets/redhat-logo-white.png">    </p:cNvPr>
           <p:cNvPicPr>
             <a:picLocks noChangeAspect="1"/>
           </p:cNvPicPr>
@@ -30918,7 +30918,7 @@
       </p:sp>
       <p:pic>
         <p:nvPicPr>
-          <p:cNvPr id="3" name="Image 0" descr="/tmp/pcwork/api-patterns-and-practices-graphql/presentation/_shared/assets/logo-candidate-2.png">    </p:cNvPr>
+          <p:cNvPr id="3" name="Image 0" descr="/work/_shared/assets/logo-candidate-2.png">    </p:cNvPr>
           <p:cNvPicPr>
             <a:picLocks noChangeAspect="1"/>
           </p:cNvPicPr>
@@ -31590,7 +31590,7 @@
       </p:sp>
       <p:pic>
         <p:nvPicPr>
-          <p:cNvPr id="3" name="Image 0" descr="/tmp/pcwork/api-patterns-and-practices-graphql/presentation/_shared/assets/logo-candidate-2.png">    </p:cNvPr>
+          <p:cNvPr id="3" name="Image 0" descr="/work/_shared/assets/logo-candidate-2.png">    </p:cNvPr>
           <p:cNvPicPr>
             <a:picLocks noChangeAspect="1"/>
           </p:cNvPicPr>
@@ -32136,7 +32136,7 @@
       </p:sp>
       <p:pic>
         <p:nvPicPr>
-          <p:cNvPr id="3" name="Image 0" descr="/tmp/pcwork/api-patterns-and-practices-graphql/presentation/_shared/assets/logo-candidate-2.png">    </p:cNvPr>
+          <p:cNvPr id="3" name="Image 0" descr="/work/_shared/assets/logo-candidate-2.png">    </p:cNvPr>
           <p:cNvPicPr>
             <a:picLocks noChangeAspect="1"/>
           </p:cNvPicPr>
@@ -32718,7 +32718,7 @@
       </p:sp>
       <p:pic>
         <p:nvPicPr>
-          <p:cNvPr id="3" name="Image 0" descr="/tmp/pcwork/api-patterns-and-practices-graphql/presentation/_shared/assets/logo-candidate-2.png">    </p:cNvPr>
+          <p:cNvPr id="3" name="Image 0" descr="/work/_shared/assets/logo-candidate-2.png">    </p:cNvPr>
           <p:cNvPicPr>
             <a:picLocks noChangeAspect="1"/>
           </p:cNvPicPr>
@@ -32820,7 +32820,7 @@
       </p:sp>
       <p:pic>
         <p:nvPicPr>
-          <p:cNvPr id="6" name="Image 1" descr="/tmp/pcwork/api-patterns-and-practices-graphql/presentation/_shared/png/25-compose-tier-topology.png">    </p:cNvPr>
+          <p:cNvPr id="6" name="Image 1" descr="/work/_shared/png/25-compose-tier-topology.png">    </p:cNvPr>
           <p:cNvPicPr>
             <a:picLocks noChangeAspect="1"/>
           </p:cNvPicPr>
@@ -32874,7 +32874,7 @@
                 <a:ea typeface="Red Hat Text" pitchFamily="34" charset="-122"/>
                 <a:cs typeface="Red Hat Text" pitchFamily="34" charset="-120"/>
               </a:rPr>
-              <a:t>Figure 25.1 — The backend network is internal, so the stacks are reached only through the edge.</a:t>
+              <a:t>Figure 25.1: The backend network is internal, so the stacks are reached only through the edge.</a:t>
             </a:r>
             <a:endParaRPr lang="en-US" sz="1300" dirty="0"/>
           </a:p>
@@ -32946,7 +32946,7 @@
       </p:sp>
       <p:pic>
         <p:nvPicPr>
-          <p:cNvPr id="3" name="Image 0" descr="/tmp/pcwork/api-patterns-and-practices-graphql/presentation/_shared/assets/logo-candidate-2.png">    </p:cNvPr>
+          <p:cNvPr id="3" name="Image 0" descr="/work/_shared/assets/logo-candidate-2.png">    </p:cNvPr>
           <p:cNvPicPr>
             <a:picLocks noChangeAspect="1"/>
           </p:cNvPicPr>
@@ -33672,7 +33672,7 @@
       </p:sp>
       <p:pic>
         <p:nvPicPr>
-          <p:cNvPr id="3" name="Image 0" descr="/tmp/pcwork/api-patterns-and-practices-graphql/presentation/_shared/assets/logo-candidate-2.png">    </p:cNvPr>
+          <p:cNvPr id="3" name="Image 0" descr="/work/_shared/assets/logo-candidate-2.png">    </p:cNvPr>
           <p:cNvPicPr>
             <a:picLocks noChangeAspect="1"/>
           </p:cNvPicPr>
@@ -34019,7 +34019,7 @@
       </p:sp>
       <p:pic>
         <p:nvPicPr>
-          <p:cNvPr id="3" name="Image 0" descr="/tmp/pcwork/api-patterns-and-practices-graphql/presentation/_shared/assets/logo-candidate-2.png">    </p:cNvPr>
+          <p:cNvPr id="3" name="Image 0" descr="/work/_shared/assets/logo-candidate-2.png">    </p:cNvPr>
           <p:cNvPicPr>
             <a:picLocks noChangeAspect="1"/>
           </p:cNvPicPr>
@@ -34420,7 +34420,7 @@
       </p:sp>
       <p:pic>
         <p:nvPicPr>
-          <p:cNvPr id="5" name="Image 0" descr="/tmp/pcwork/api-patterns-and-practices-graphql/presentation/_shared/assets/redhat-logo-white.png">    </p:cNvPr>
+          <p:cNvPr id="5" name="Image 0" descr="/work/_shared/assets/redhat-logo-white.png">    </p:cNvPr>
           <p:cNvPicPr>
             <a:picLocks noChangeAspect="1"/>
           </p:cNvPicPr>
@@ -34508,7 +34508,7 @@
       </p:sp>
       <p:pic>
         <p:nvPicPr>
-          <p:cNvPr id="3" name="Image 0" descr="/tmp/pcwork/api-patterns-and-practices-graphql/presentation/_shared/assets/logo-candidate-2.png">    </p:cNvPr>
+          <p:cNvPr id="3" name="Image 0" descr="/work/_shared/assets/logo-candidate-2.png">    </p:cNvPr>
           <p:cNvPicPr>
             <a:picLocks noChangeAspect="1"/>
           </p:cNvPicPr>
@@ -35252,7 +35252,7 @@
       </p:sp>
       <p:pic>
         <p:nvPicPr>
-          <p:cNvPr id="3" name="Image 0" descr="/tmp/pcwork/api-patterns-and-practices-graphql/presentation/_shared/assets/logo-candidate-2.png">    </p:cNvPr>
+          <p:cNvPr id="3" name="Image 0" descr="/work/_shared/assets/logo-candidate-2.png">    </p:cNvPr>
           <p:cNvPicPr>
             <a:picLocks noChangeAspect="1"/>
           </p:cNvPicPr>
@@ -36014,7 +36014,7 @@
       </p:sp>
       <p:pic>
         <p:nvPicPr>
-          <p:cNvPr id="3" name="Image 0" descr="/tmp/pcwork/api-patterns-and-practices-graphql/presentation/_shared/assets/logo-candidate-2.png">    </p:cNvPr>
+          <p:cNvPr id="3" name="Image 0" descr="/work/_shared/assets/logo-candidate-2.png">    </p:cNvPr>
           <p:cNvPicPr>
             <a:picLocks noChangeAspect="1"/>
           </p:cNvPicPr>
@@ -36506,7 +36506,7 @@
       </p:sp>
       <p:pic>
         <p:nvPicPr>
-          <p:cNvPr id="3" name="Image 0" descr="/tmp/pcwork/api-patterns-and-practices-graphql/presentation/_shared/assets/logo-candidate-2.png">    </p:cNvPr>
+          <p:cNvPr id="3" name="Image 0" descr="/work/_shared/assets/logo-candidate-2.png">    </p:cNvPr>
           <p:cNvPicPr>
             <a:picLocks noChangeAspect="1"/>
           </p:cNvPicPr>
@@ -36608,7 +36608,7 @@
       </p:sp>
       <p:pic>
         <p:nvPicPr>
-          <p:cNvPr id="6" name="Image 1" descr="/tmp/pcwork/api-patterns-and-practices-graphql/presentation/_shared/assets/qr-graphql-site.png">    </p:cNvPr>
+          <p:cNvPr id="6" name="Image 1" descr="/work/_shared/assets/qr-graphql-site.png">    </p:cNvPr>
           <p:cNvPicPr>
             <a:picLocks noChangeAspect="1"/>
           </p:cNvPicPr>
@@ -36749,7 +36749,7 @@
       </p:sp>
       <p:pic>
         <p:nvPicPr>
-          <p:cNvPr id="10" name="Image 2" descr="/tmp/pcwork/api-patterns-and-practices-graphql/presentation/_shared/assets/qr-hub.png">    </p:cNvPr>
+          <p:cNvPr id="10" name="Image 2" descr="/work/_shared/assets/qr-hub.png">    </p:cNvPr>
           <p:cNvPicPr>
             <a:picLocks noChangeAspect="1"/>
           </p:cNvPicPr>
@@ -36954,7 +36954,7 @@
       </p:sp>
       <p:pic>
         <p:nvPicPr>
-          <p:cNvPr id="3" name="Image 0" descr="/tmp/pcwork/api-patterns-and-practices-graphql/presentation/_shared/assets/logo-candidate-2.png">    </p:cNvPr>
+          <p:cNvPr id="3" name="Image 0" descr="/work/_shared/assets/logo-candidate-2.png">    </p:cNvPr>
           <p:cNvPicPr>
             <a:picLocks noChangeAspect="1"/>
           </p:cNvPicPr>
@@ -37644,7 +37644,7 @@
       </p:sp>
       <p:pic>
         <p:nvPicPr>
-          <p:cNvPr id="3" name="Image 0" descr="/tmp/pcwork/api-patterns-and-practices-graphql/presentation/_shared/assets/logo-candidate-2.png">    </p:cNvPr>
+          <p:cNvPr id="3" name="Image 0" descr="/work/_shared/assets/logo-candidate-2.png">    </p:cNvPr>
           <p:cNvPicPr>
             <a:picLocks noChangeAspect="1"/>
           </p:cNvPicPr>
@@ -38430,7 +38430,7 @@
       </p:sp>
       <p:pic>
         <p:nvPicPr>
-          <p:cNvPr id="5" name="Image 0" descr="/tmp/pcwork/api-patterns-and-practices-graphql/presentation/_shared/assets/redhat-logo-white.png">    </p:cNvPr>
+          <p:cNvPr id="5" name="Image 0" descr="/work/_shared/assets/redhat-logo-white.png">    </p:cNvPr>
           <p:cNvPicPr>
             <a:picLocks noChangeAspect="1"/>
           </p:cNvPicPr>
